--- a/LabBook_10.pptx
+++ b/LabBook_10.pptx
@@ -5,10 +5,10 @@
     <p:sldMasterId id="2147483648" r:id="rId1"/>
   </p:sldMasterIdLst>
   <p:notesMasterIdLst>
-    <p:notesMasterId r:id="rId19"/>
+    <p:notesMasterId r:id="rId23"/>
   </p:notesMasterIdLst>
   <p:handoutMasterIdLst>
-    <p:handoutMasterId r:id="rId20"/>
+    <p:handoutMasterId r:id="rId24"/>
   </p:handoutMasterIdLst>
   <p:sldIdLst>
     <p:sldId id="256" r:id="rId2"/>
@@ -27,7 +27,11 @@
     <p:sldId id="306" r:id="rId15"/>
     <p:sldId id="293" r:id="rId16"/>
     <p:sldId id="307" r:id="rId17"/>
-    <p:sldId id="288" r:id="rId18"/>
+    <p:sldId id="309" r:id="rId18"/>
+    <p:sldId id="310" r:id="rId19"/>
+    <p:sldId id="311" r:id="rId20"/>
+    <p:sldId id="308" r:id="rId21"/>
+    <p:sldId id="288" r:id="rId22"/>
   </p:sldIdLst>
   <p:sldSz cx="12192000" cy="6858000"/>
   <p:notesSz cx="12192000" cy="6858000"/>
@@ -402,7 +406,7 @@
           <a:p>
             <a:fld id="{8438F8DC-35B0-48E6-A86E-42F1F08DD00F}" type="datetimeFigureOut">
               <a:rPr lang="es-ES" smtClean="0"/>
-              <a:t>20/02/2026</a:t>
+              <a:t>28/02/2026</a:t>
             </a:fld>
             <a:endParaRPr lang="es-ES"/>
           </a:p>
@@ -579,7 +583,7 @@
           <a:p>
             <a:fld id="{FACBDC12-F39B-4B97-8F4D-6734F9D366FF}" type="datetimeFigureOut">
               <a:rPr lang="es-ES" smtClean="0"/>
-              <a:t>20/02/2026</a:t>
+              <a:t>28/02/2026</a:t>
             </a:fld>
             <a:endParaRPr lang="es-ES"/>
           </a:p>
@@ -1461,6 +1465,438 @@
     <p:extLst>
       <p:ext uri="{BB962C8B-B14F-4D97-AF65-F5344CB8AC3E}">
         <p14:creationId xmlns:p14="http://schemas.microsoft.com/office/powerpoint/2010/main" val="658141471"/>
+      </p:ext>
+    </p:extLst>
+  </p:cSld>
+  <p:clrMapOvr>
+    <a:masterClrMapping/>
+  </p:clrMapOvr>
+</p:notes>
+</file>
+
+<file path=ppt/notesSlides/notesSlide15.xml><?xml version="1.0" encoding="utf-8"?>
+<p:notes xmlns:a="http://schemas.openxmlformats.org/drawingml/2006/main" xmlns:r="http://schemas.openxmlformats.org/officeDocument/2006/relationships" xmlns:p="http://schemas.openxmlformats.org/presentationml/2006/main">
+  <p:cSld>
+    <p:spTree>
+      <p:nvGrpSpPr>
+        <p:cNvPr id="1" name="">
+          <a:extLst>
+            <a:ext uri="{FF2B5EF4-FFF2-40B4-BE49-F238E27FC236}">
+              <a16:creationId xmlns:a16="http://schemas.microsoft.com/office/drawing/2014/main" id="{6E14F4CF-A52D-6BCA-81BF-9606CD189C3C}"/>
+            </a:ext>
+          </a:extLst>
+        </p:cNvPr>
+        <p:cNvGrpSpPr/>
+        <p:nvPr/>
+      </p:nvGrpSpPr>
+      <p:grpSpPr>
+        <a:xfrm>
+          <a:off x="0" y="0"/>
+          <a:ext cx="0" cy="0"/>
+          <a:chOff x="0" y="0"/>
+          <a:chExt cx="0" cy="0"/>
+        </a:xfrm>
+      </p:grpSpPr>
+      <p:sp>
+        <p:nvSpPr>
+          <p:cNvPr id="2" name="Marcador de imagen de diapositiva 1">
+            <a:extLst>
+              <a:ext uri="{FF2B5EF4-FFF2-40B4-BE49-F238E27FC236}">
+                <a16:creationId xmlns:a16="http://schemas.microsoft.com/office/drawing/2014/main" id="{E26C075C-C8C3-77D4-B4D8-8E635F238D7B}"/>
+              </a:ext>
+            </a:extLst>
+          </p:cNvPr>
+          <p:cNvSpPr>
+            <a:spLocks noGrp="1" noRot="1" noChangeAspect="1"/>
+          </p:cNvSpPr>
+          <p:nvPr>
+            <p:ph type="sldImg"/>
+          </p:nvPr>
+        </p:nvSpPr>
+        <p:spPr/>
+      </p:sp>
+      <p:sp>
+        <p:nvSpPr>
+          <p:cNvPr id="3" name="Marcador de notas 2">
+            <a:extLst>
+              <a:ext uri="{FF2B5EF4-FFF2-40B4-BE49-F238E27FC236}">
+                <a16:creationId xmlns:a16="http://schemas.microsoft.com/office/drawing/2014/main" id="{4BA50DC8-CAFE-74A4-20FD-ACCC59C0FCD6}"/>
+              </a:ext>
+            </a:extLst>
+          </p:cNvPr>
+          <p:cNvSpPr>
+            <a:spLocks noGrp="1"/>
+          </p:cNvSpPr>
+          <p:nvPr>
+            <p:ph type="body" idx="1"/>
+          </p:nvPr>
+        </p:nvSpPr>
+        <p:spPr/>
+        <p:txBody>
+          <a:bodyPr/>
+          <a:lstStyle/>
+          <a:p>
+            <a:endParaRPr lang="es-ES" dirty="0"/>
+          </a:p>
+        </p:txBody>
+      </p:sp>
+      <p:sp>
+        <p:nvSpPr>
+          <p:cNvPr id="4" name="Marcador de número de diapositiva 3">
+            <a:extLst>
+              <a:ext uri="{FF2B5EF4-FFF2-40B4-BE49-F238E27FC236}">
+                <a16:creationId xmlns:a16="http://schemas.microsoft.com/office/drawing/2014/main" id="{074C3599-E016-A34B-9260-48B5A8C0CF68}"/>
+              </a:ext>
+            </a:extLst>
+          </p:cNvPr>
+          <p:cNvSpPr>
+            <a:spLocks noGrp="1"/>
+          </p:cNvSpPr>
+          <p:nvPr>
+            <p:ph type="sldNum" sz="quarter" idx="5"/>
+          </p:nvPr>
+        </p:nvSpPr>
+        <p:spPr/>
+        <p:txBody>
+          <a:bodyPr/>
+          <a:lstStyle/>
+          <a:p>
+            <a:fld id="{676223B9-C868-4436-87D9-1A3152E1157A}" type="slidenum">
+              <a:rPr lang="es-ES" smtClean="0"/>
+              <a:t>17</a:t>
+            </a:fld>
+            <a:endParaRPr lang="es-ES"/>
+          </a:p>
+        </p:txBody>
+      </p:sp>
+    </p:spTree>
+    <p:extLst>
+      <p:ext uri="{BB962C8B-B14F-4D97-AF65-F5344CB8AC3E}">
+        <p14:creationId xmlns:p14="http://schemas.microsoft.com/office/powerpoint/2010/main" val="2316383381"/>
+      </p:ext>
+    </p:extLst>
+  </p:cSld>
+  <p:clrMapOvr>
+    <a:masterClrMapping/>
+  </p:clrMapOvr>
+</p:notes>
+</file>
+
+<file path=ppt/notesSlides/notesSlide16.xml><?xml version="1.0" encoding="utf-8"?>
+<p:notes xmlns:a="http://schemas.openxmlformats.org/drawingml/2006/main" xmlns:r="http://schemas.openxmlformats.org/officeDocument/2006/relationships" xmlns:p="http://schemas.openxmlformats.org/presentationml/2006/main">
+  <p:cSld>
+    <p:spTree>
+      <p:nvGrpSpPr>
+        <p:cNvPr id="1" name="">
+          <a:extLst>
+            <a:ext uri="{FF2B5EF4-FFF2-40B4-BE49-F238E27FC236}">
+              <a16:creationId xmlns:a16="http://schemas.microsoft.com/office/drawing/2014/main" id="{C6233339-923D-7380-9863-2B7346072171}"/>
+            </a:ext>
+          </a:extLst>
+        </p:cNvPr>
+        <p:cNvGrpSpPr/>
+        <p:nvPr/>
+      </p:nvGrpSpPr>
+      <p:grpSpPr>
+        <a:xfrm>
+          <a:off x="0" y="0"/>
+          <a:ext cx="0" cy="0"/>
+          <a:chOff x="0" y="0"/>
+          <a:chExt cx="0" cy="0"/>
+        </a:xfrm>
+      </p:grpSpPr>
+      <p:sp>
+        <p:nvSpPr>
+          <p:cNvPr id="2" name="Marcador de imagen de diapositiva 1">
+            <a:extLst>
+              <a:ext uri="{FF2B5EF4-FFF2-40B4-BE49-F238E27FC236}">
+                <a16:creationId xmlns:a16="http://schemas.microsoft.com/office/drawing/2014/main" id="{EA13A8DC-FF50-827D-B136-809A433B036B}"/>
+              </a:ext>
+            </a:extLst>
+          </p:cNvPr>
+          <p:cNvSpPr>
+            <a:spLocks noGrp="1" noRot="1" noChangeAspect="1"/>
+          </p:cNvSpPr>
+          <p:nvPr>
+            <p:ph type="sldImg"/>
+          </p:nvPr>
+        </p:nvSpPr>
+        <p:spPr/>
+      </p:sp>
+      <p:sp>
+        <p:nvSpPr>
+          <p:cNvPr id="3" name="Marcador de notas 2">
+            <a:extLst>
+              <a:ext uri="{FF2B5EF4-FFF2-40B4-BE49-F238E27FC236}">
+                <a16:creationId xmlns:a16="http://schemas.microsoft.com/office/drawing/2014/main" id="{4AF2EAFB-5706-C483-FAA1-8DF9EE145174}"/>
+              </a:ext>
+            </a:extLst>
+          </p:cNvPr>
+          <p:cNvSpPr>
+            <a:spLocks noGrp="1"/>
+          </p:cNvSpPr>
+          <p:nvPr>
+            <p:ph type="body" idx="1"/>
+          </p:nvPr>
+        </p:nvSpPr>
+        <p:spPr/>
+        <p:txBody>
+          <a:bodyPr/>
+          <a:lstStyle/>
+          <a:p>
+            <a:endParaRPr lang="es-ES" dirty="0"/>
+          </a:p>
+        </p:txBody>
+      </p:sp>
+      <p:sp>
+        <p:nvSpPr>
+          <p:cNvPr id="4" name="Marcador de número de diapositiva 3">
+            <a:extLst>
+              <a:ext uri="{FF2B5EF4-FFF2-40B4-BE49-F238E27FC236}">
+                <a16:creationId xmlns:a16="http://schemas.microsoft.com/office/drawing/2014/main" id="{410EA8A3-43A6-1DE0-D7E5-0000016146E4}"/>
+              </a:ext>
+            </a:extLst>
+          </p:cNvPr>
+          <p:cNvSpPr>
+            <a:spLocks noGrp="1"/>
+          </p:cNvSpPr>
+          <p:nvPr>
+            <p:ph type="sldNum" sz="quarter" idx="5"/>
+          </p:nvPr>
+        </p:nvSpPr>
+        <p:spPr/>
+        <p:txBody>
+          <a:bodyPr/>
+          <a:lstStyle/>
+          <a:p>
+            <a:fld id="{676223B9-C868-4436-87D9-1A3152E1157A}" type="slidenum">
+              <a:rPr lang="es-ES" smtClean="0"/>
+              <a:t>18</a:t>
+            </a:fld>
+            <a:endParaRPr lang="es-ES"/>
+          </a:p>
+        </p:txBody>
+      </p:sp>
+    </p:spTree>
+    <p:extLst>
+      <p:ext uri="{BB962C8B-B14F-4D97-AF65-F5344CB8AC3E}">
+        <p14:creationId xmlns:p14="http://schemas.microsoft.com/office/powerpoint/2010/main" val="3129202941"/>
+      </p:ext>
+    </p:extLst>
+  </p:cSld>
+  <p:clrMapOvr>
+    <a:masterClrMapping/>
+  </p:clrMapOvr>
+</p:notes>
+</file>
+
+<file path=ppt/notesSlides/notesSlide17.xml><?xml version="1.0" encoding="utf-8"?>
+<p:notes xmlns:a="http://schemas.openxmlformats.org/drawingml/2006/main" xmlns:r="http://schemas.openxmlformats.org/officeDocument/2006/relationships" xmlns:p="http://schemas.openxmlformats.org/presentationml/2006/main">
+  <p:cSld>
+    <p:spTree>
+      <p:nvGrpSpPr>
+        <p:cNvPr id="1" name="">
+          <a:extLst>
+            <a:ext uri="{FF2B5EF4-FFF2-40B4-BE49-F238E27FC236}">
+              <a16:creationId xmlns:a16="http://schemas.microsoft.com/office/drawing/2014/main" id="{D5B645BC-A806-9C4D-A95E-6E2E6C2F7F99}"/>
+            </a:ext>
+          </a:extLst>
+        </p:cNvPr>
+        <p:cNvGrpSpPr/>
+        <p:nvPr/>
+      </p:nvGrpSpPr>
+      <p:grpSpPr>
+        <a:xfrm>
+          <a:off x="0" y="0"/>
+          <a:ext cx="0" cy="0"/>
+          <a:chOff x="0" y="0"/>
+          <a:chExt cx="0" cy="0"/>
+        </a:xfrm>
+      </p:grpSpPr>
+      <p:sp>
+        <p:nvSpPr>
+          <p:cNvPr id="2" name="Marcador de imagen de diapositiva 1">
+            <a:extLst>
+              <a:ext uri="{FF2B5EF4-FFF2-40B4-BE49-F238E27FC236}">
+                <a16:creationId xmlns:a16="http://schemas.microsoft.com/office/drawing/2014/main" id="{5392DDC3-B0FA-766E-56E1-C1DF3FA04656}"/>
+              </a:ext>
+            </a:extLst>
+          </p:cNvPr>
+          <p:cNvSpPr>
+            <a:spLocks noGrp="1" noRot="1" noChangeAspect="1"/>
+          </p:cNvSpPr>
+          <p:nvPr>
+            <p:ph type="sldImg"/>
+          </p:nvPr>
+        </p:nvSpPr>
+        <p:spPr/>
+      </p:sp>
+      <p:sp>
+        <p:nvSpPr>
+          <p:cNvPr id="3" name="Marcador de notas 2">
+            <a:extLst>
+              <a:ext uri="{FF2B5EF4-FFF2-40B4-BE49-F238E27FC236}">
+                <a16:creationId xmlns:a16="http://schemas.microsoft.com/office/drawing/2014/main" id="{2F638E00-2DAD-F2B2-18EB-14AB4D11599F}"/>
+              </a:ext>
+            </a:extLst>
+          </p:cNvPr>
+          <p:cNvSpPr>
+            <a:spLocks noGrp="1"/>
+          </p:cNvSpPr>
+          <p:nvPr>
+            <p:ph type="body" idx="1"/>
+          </p:nvPr>
+        </p:nvSpPr>
+        <p:spPr/>
+        <p:txBody>
+          <a:bodyPr/>
+          <a:lstStyle/>
+          <a:p>
+            <a:endParaRPr lang="es-ES" dirty="0"/>
+          </a:p>
+        </p:txBody>
+      </p:sp>
+      <p:sp>
+        <p:nvSpPr>
+          <p:cNvPr id="4" name="Marcador de número de diapositiva 3">
+            <a:extLst>
+              <a:ext uri="{FF2B5EF4-FFF2-40B4-BE49-F238E27FC236}">
+                <a16:creationId xmlns:a16="http://schemas.microsoft.com/office/drawing/2014/main" id="{A17806A0-C6B2-93E9-EBFF-182C7F81CFC6}"/>
+              </a:ext>
+            </a:extLst>
+          </p:cNvPr>
+          <p:cNvSpPr>
+            <a:spLocks noGrp="1"/>
+          </p:cNvSpPr>
+          <p:nvPr>
+            <p:ph type="sldNum" sz="quarter" idx="5"/>
+          </p:nvPr>
+        </p:nvSpPr>
+        <p:spPr/>
+        <p:txBody>
+          <a:bodyPr/>
+          <a:lstStyle/>
+          <a:p>
+            <a:fld id="{676223B9-C868-4436-87D9-1A3152E1157A}" type="slidenum">
+              <a:rPr lang="es-ES" smtClean="0"/>
+              <a:t>19</a:t>
+            </a:fld>
+            <a:endParaRPr lang="es-ES"/>
+          </a:p>
+        </p:txBody>
+      </p:sp>
+    </p:spTree>
+    <p:extLst>
+      <p:ext uri="{BB962C8B-B14F-4D97-AF65-F5344CB8AC3E}">
+        <p14:creationId xmlns:p14="http://schemas.microsoft.com/office/powerpoint/2010/main" val="1404681457"/>
+      </p:ext>
+    </p:extLst>
+  </p:cSld>
+  <p:clrMapOvr>
+    <a:masterClrMapping/>
+  </p:clrMapOvr>
+</p:notes>
+</file>
+
+<file path=ppt/notesSlides/notesSlide18.xml><?xml version="1.0" encoding="utf-8"?>
+<p:notes xmlns:a="http://schemas.openxmlformats.org/drawingml/2006/main" xmlns:r="http://schemas.openxmlformats.org/officeDocument/2006/relationships" xmlns:p="http://schemas.openxmlformats.org/presentationml/2006/main">
+  <p:cSld>
+    <p:spTree>
+      <p:nvGrpSpPr>
+        <p:cNvPr id="1" name="">
+          <a:extLst>
+            <a:ext uri="{FF2B5EF4-FFF2-40B4-BE49-F238E27FC236}">
+              <a16:creationId xmlns:a16="http://schemas.microsoft.com/office/drawing/2014/main" id="{722E35B6-4284-DBED-FC96-F0E2EBD85877}"/>
+            </a:ext>
+          </a:extLst>
+        </p:cNvPr>
+        <p:cNvGrpSpPr/>
+        <p:nvPr/>
+      </p:nvGrpSpPr>
+      <p:grpSpPr>
+        <a:xfrm>
+          <a:off x="0" y="0"/>
+          <a:ext cx="0" cy="0"/>
+          <a:chOff x="0" y="0"/>
+          <a:chExt cx="0" cy="0"/>
+        </a:xfrm>
+      </p:grpSpPr>
+      <p:sp>
+        <p:nvSpPr>
+          <p:cNvPr id="2" name="Marcador de imagen de diapositiva 1">
+            <a:extLst>
+              <a:ext uri="{FF2B5EF4-FFF2-40B4-BE49-F238E27FC236}">
+                <a16:creationId xmlns:a16="http://schemas.microsoft.com/office/drawing/2014/main" id="{293DD188-0AEA-EAA8-8B0F-9DEB0537F706}"/>
+              </a:ext>
+            </a:extLst>
+          </p:cNvPr>
+          <p:cNvSpPr>
+            <a:spLocks noGrp="1" noRot="1" noChangeAspect="1"/>
+          </p:cNvSpPr>
+          <p:nvPr>
+            <p:ph type="sldImg"/>
+          </p:nvPr>
+        </p:nvSpPr>
+        <p:spPr/>
+      </p:sp>
+      <p:sp>
+        <p:nvSpPr>
+          <p:cNvPr id="3" name="Marcador de notas 2">
+            <a:extLst>
+              <a:ext uri="{FF2B5EF4-FFF2-40B4-BE49-F238E27FC236}">
+                <a16:creationId xmlns:a16="http://schemas.microsoft.com/office/drawing/2014/main" id="{5C78E6DD-0FCF-60CC-30D3-321C2FDE5D6D}"/>
+              </a:ext>
+            </a:extLst>
+          </p:cNvPr>
+          <p:cNvSpPr>
+            <a:spLocks noGrp="1"/>
+          </p:cNvSpPr>
+          <p:nvPr>
+            <p:ph type="body" idx="1"/>
+          </p:nvPr>
+        </p:nvSpPr>
+        <p:spPr/>
+        <p:txBody>
+          <a:bodyPr/>
+          <a:lstStyle/>
+          <a:p>
+            <a:endParaRPr lang="es-ES" dirty="0"/>
+          </a:p>
+        </p:txBody>
+      </p:sp>
+      <p:sp>
+        <p:nvSpPr>
+          <p:cNvPr id="4" name="Marcador de número de diapositiva 3">
+            <a:extLst>
+              <a:ext uri="{FF2B5EF4-FFF2-40B4-BE49-F238E27FC236}">
+                <a16:creationId xmlns:a16="http://schemas.microsoft.com/office/drawing/2014/main" id="{B48BB709-978F-F9A2-2412-15C0BF979C83}"/>
+              </a:ext>
+            </a:extLst>
+          </p:cNvPr>
+          <p:cNvSpPr>
+            <a:spLocks noGrp="1"/>
+          </p:cNvSpPr>
+          <p:nvPr>
+            <p:ph type="sldNum" sz="quarter" idx="5"/>
+          </p:nvPr>
+        </p:nvSpPr>
+        <p:spPr/>
+        <p:txBody>
+          <a:bodyPr/>
+          <a:lstStyle/>
+          <a:p>
+            <a:fld id="{676223B9-C868-4436-87D9-1A3152E1157A}" type="slidenum">
+              <a:rPr lang="es-ES" smtClean="0"/>
+              <a:t>20</a:t>
+            </a:fld>
+            <a:endParaRPr lang="es-ES"/>
+          </a:p>
+        </p:txBody>
+      </p:sp>
+    </p:spTree>
+    <p:extLst>
+      <p:ext uri="{BB962C8B-B14F-4D97-AF65-F5344CB8AC3E}">
+        <p14:creationId xmlns:p14="http://schemas.microsoft.com/office/powerpoint/2010/main" val="2237889055"/>
       </p:ext>
     </p:extLst>
   </p:cSld>
@@ -3949,8 +4385,8 @@
           <a:chExt cx="0" cy="0"/>
         </a:xfrm>
       </p:grpSpPr>
-      <mc:AlternateContent xmlns:mc="http://schemas.openxmlformats.org/markup-compatibility/2006">
-        <mc:Choice xmlns:a14="http://schemas.microsoft.com/office/drawing/2010/main" Requires="a14">
+      <mc:AlternateContent xmlns:mc="http://schemas.openxmlformats.org/markup-compatibility/2006" xmlns:a14="http://schemas.microsoft.com/office/drawing/2010/main">
+        <mc:Choice Requires="a14">
           <p:sp>
             <p:nvSpPr>
               <p:cNvPr id="16" name="object 16">
@@ -4277,7 +4713,7 @@
             </p:txBody>
           </p:sp>
         </mc:Choice>
-        <mc:Fallback>
+        <mc:Fallback xmlns="">
           <p:sp>
             <p:nvSpPr>
               <p:cNvPr id="16" name="object 16">
@@ -4512,8 +4948,8 @@
           </a:p>
         </p:txBody>
       </p:sp>
-      <mc:AlternateContent xmlns:mc="http://schemas.openxmlformats.org/markup-compatibility/2006">
-        <mc:Choice xmlns:a14="http://schemas.microsoft.com/office/drawing/2010/main" Requires="a14">
+      <mc:AlternateContent xmlns:mc="http://schemas.openxmlformats.org/markup-compatibility/2006" xmlns:a14="http://schemas.microsoft.com/office/drawing/2010/main">
+        <mc:Choice Requires="a14">
           <p:sp>
             <p:nvSpPr>
               <p:cNvPr id="21" name="CuadroTexto 20">
@@ -4938,7 +5374,7 @@
             </p:txBody>
           </p:sp>
         </mc:Choice>
-        <mc:Fallback>
+        <mc:Fallback xmlns="">
           <p:sp>
             <p:nvSpPr>
               <p:cNvPr id="21" name="CuadroTexto 20">
@@ -5279,8 +5715,8 @@
           <a:chExt cx="0" cy="0"/>
         </a:xfrm>
       </p:grpSpPr>
-      <mc:AlternateContent xmlns:mc="http://schemas.openxmlformats.org/markup-compatibility/2006">
-        <mc:Choice xmlns:a14="http://schemas.microsoft.com/office/drawing/2010/main" Requires="a14">
+      <mc:AlternateContent xmlns:mc="http://schemas.openxmlformats.org/markup-compatibility/2006" xmlns:a14="http://schemas.microsoft.com/office/drawing/2010/main">
+        <mc:Choice Requires="a14">
           <p:sp>
             <p:nvSpPr>
               <p:cNvPr id="16" name="object 16">
@@ -5607,7 +6043,7 @@
             </p:txBody>
           </p:sp>
         </mc:Choice>
-        <mc:Fallback>
+        <mc:Fallback xmlns="">
           <p:sp>
             <p:nvSpPr>
               <p:cNvPr id="16" name="object 16">
@@ -5915,8 +6351,8 @@
           </a:p>
         </p:txBody>
       </p:sp>
-      <mc:AlternateContent xmlns:mc="http://schemas.openxmlformats.org/markup-compatibility/2006">
-        <mc:Choice xmlns:a14="http://schemas.microsoft.com/office/drawing/2010/main" Requires="a14">
+      <mc:AlternateContent xmlns:mc="http://schemas.openxmlformats.org/markup-compatibility/2006" xmlns:a14="http://schemas.microsoft.com/office/drawing/2010/main">
+        <mc:Choice Requires="a14">
           <p:sp>
             <p:nvSpPr>
               <p:cNvPr id="21" name="CuadroTexto 20">
@@ -6341,7 +6777,7 @@
             </p:txBody>
           </p:sp>
         </mc:Choice>
-        <mc:Fallback>
+        <mc:Fallback xmlns="">
           <p:sp>
             <p:nvSpPr>
               <p:cNvPr id="21" name="CuadroTexto 20">
@@ -6492,8 +6928,8 @@
           <a:chExt cx="0" cy="0"/>
         </a:xfrm>
       </p:grpSpPr>
-      <mc:AlternateContent xmlns:mc="http://schemas.openxmlformats.org/markup-compatibility/2006">
-        <mc:Choice xmlns:a14="http://schemas.microsoft.com/office/drawing/2010/main" Requires="a14">
+      <mc:AlternateContent xmlns:mc="http://schemas.openxmlformats.org/markup-compatibility/2006" xmlns:a14="http://schemas.microsoft.com/office/drawing/2010/main">
+        <mc:Choice Requires="a14">
           <p:sp>
             <p:nvSpPr>
               <p:cNvPr id="16" name="object 16">
@@ -6820,7 +7256,7 @@
             </p:txBody>
           </p:sp>
         </mc:Choice>
-        <mc:Fallback>
+        <mc:Fallback xmlns="">
           <p:sp>
             <p:nvSpPr>
               <p:cNvPr id="16" name="object 16">
@@ -7055,8 +7491,8 @@
           </a:p>
         </p:txBody>
       </p:sp>
-      <mc:AlternateContent xmlns:mc="http://schemas.openxmlformats.org/markup-compatibility/2006">
-        <mc:Choice xmlns:a14="http://schemas.microsoft.com/office/drawing/2010/main" Requires="a14">
+      <mc:AlternateContent xmlns:mc="http://schemas.openxmlformats.org/markup-compatibility/2006" xmlns:a14="http://schemas.microsoft.com/office/drawing/2010/main">
+        <mc:Choice Requires="a14">
           <p:sp>
             <p:nvSpPr>
               <p:cNvPr id="21" name="CuadroTexto 20">
@@ -7481,7 +7917,7 @@
             </p:txBody>
           </p:sp>
         </mc:Choice>
-        <mc:Fallback>
+        <mc:Fallback xmlns="">
           <p:sp>
             <p:nvSpPr>
               <p:cNvPr id="21" name="CuadroTexto 20">
@@ -7562,8 +7998,8 @@
           <a:chExt cx="0" cy="0"/>
         </a:xfrm>
       </p:grpSpPr>
-      <mc:AlternateContent xmlns:mc="http://schemas.openxmlformats.org/markup-compatibility/2006">
-        <mc:Choice xmlns:a14="http://schemas.microsoft.com/office/drawing/2010/main" Requires="a14">
+      <mc:AlternateContent xmlns:mc="http://schemas.openxmlformats.org/markup-compatibility/2006" xmlns:a14="http://schemas.microsoft.com/office/drawing/2010/main">
+        <mc:Choice Requires="a14">
           <p:sp>
             <p:nvSpPr>
               <p:cNvPr id="16" name="object 16">
@@ -7890,7 +8326,7 @@
             </p:txBody>
           </p:sp>
         </mc:Choice>
-        <mc:Fallback>
+        <mc:Fallback xmlns="">
           <p:sp>
             <p:nvSpPr>
               <p:cNvPr id="16" name="object 16">
@@ -8198,8 +8634,8 @@
           </a:p>
         </p:txBody>
       </p:sp>
-      <mc:AlternateContent xmlns:mc="http://schemas.openxmlformats.org/markup-compatibility/2006">
-        <mc:Choice xmlns:a14="http://schemas.microsoft.com/office/drawing/2010/main" Requires="a14">
+      <mc:AlternateContent xmlns:mc="http://schemas.openxmlformats.org/markup-compatibility/2006" xmlns:a14="http://schemas.microsoft.com/office/drawing/2010/main">
+        <mc:Choice Requires="a14">
           <p:sp>
             <p:nvSpPr>
               <p:cNvPr id="21" name="CuadroTexto 20">
@@ -8624,7 +9060,7 @@
             </p:txBody>
           </p:sp>
         </mc:Choice>
-        <mc:Fallback>
+        <mc:Fallback xmlns="">
           <p:sp>
             <p:nvSpPr>
               <p:cNvPr id="21" name="CuadroTexto 20">
@@ -8775,8 +9211,8 @@
           <a:chExt cx="0" cy="0"/>
         </a:xfrm>
       </p:grpSpPr>
-      <mc:AlternateContent xmlns:mc="http://schemas.openxmlformats.org/markup-compatibility/2006">
-        <mc:Choice xmlns:a14="http://schemas.microsoft.com/office/drawing/2010/main" Requires="a14">
+      <mc:AlternateContent xmlns:mc="http://schemas.openxmlformats.org/markup-compatibility/2006" xmlns:a14="http://schemas.microsoft.com/office/drawing/2010/main">
+        <mc:Choice Requires="a14">
           <p:sp>
             <p:nvSpPr>
               <p:cNvPr id="16" name="object 16">
@@ -9103,7 +9539,7 @@
             </p:txBody>
           </p:sp>
         </mc:Choice>
-        <mc:Fallback>
+        <mc:Fallback xmlns="">
           <p:sp>
             <p:nvSpPr>
               <p:cNvPr id="16" name="object 16">
@@ -9338,8 +9774,8 @@
           </a:p>
         </p:txBody>
       </p:sp>
-      <mc:AlternateContent xmlns:mc="http://schemas.openxmlformats.org/markup-compatibility/2006">
-        <mc:Choice xmlns:a14="http://schemas.microsoft.com/office/drawing/2010/main" Requires="a14">
+      <mc:AlternateContent xmlns:mc="http://schemas.openxmlformats.org/markup-compatibility/2006" xmlns:a14="http://schemas.microsoft.com/office/drawing/2010/main">
+        <mc:Choice Requires="a14">
           <p:sp>
             <p:nvSpPr>
               <p:cNvPr id="21" name="CuadroTexto 20">
@@ -9764,7 +10200,7 @@
             </p:txBody>
           </p:sp>
         </mc:Choice>
-        <mc:Fallback>
+        <mc:Fallback xmlns="">
           <p:sp>
             <p:nvSpPr>
               <p:cNvPr id="21" name="CuadroTexto 20">
@@ -10634,322 +11070,6 @@
           </a:p>
         </p:txBody>
       </p:sp>
-      <p:sp>
-        <p:nvSpPr>
-          <p:cNvPr id="2" name="CuadroTexto 1">
-            <a:extLst>
-              <a:ext uri="{FF2B5EF4-FFF2-40B4-BE49-F238E27FC236}">
-                <a16:creationId xmlns:a16="http://schemas.microsoft.com/office/drawing/2014/main" id="{E773404B-53DA-562B-36EF-1505710DA9B7}"/>
-              </a:ext>
-            </a:extLst>
-          </p:cNvPr>
-          <p:cNvSpPr txBox="1"/>
-          <p:nvPr/>
-        </p:nvSpPr>
-        <p:spPr>
-          <a:xfrm>
-            <a:off x="609441" y="4860334"/>
-            <a:ext cx="11199971" cy="1200329"/>
-          </a:xfrm>
-          <a:prstGeom prst="rect">
-            <a:avLst/>
-          </a:prstGeom>
-          <a:solidFill>
-            <a:schemeClr val="bg1">
-              <a:lumMod val="95000"/>
-            </a:schemeClr>
-          </a:solidFill>
-          <a:ln w="28575">
-            <a:solidFill>
-              <a:srgbClr val="E0700D"/>
-            </a:solidFill>
-          </a:ln>
-        </p:spPr>
-        <p:txBody>
-          <a:bodyPr wrap="square" rtlCol="0">
-            <a:spAutoFit/>
-          </a:bodyPr>
-          <a:lstStyle/>
-          <a:p>
-            <a:pPr algn="just"/>
-            <a:r>
-              <a:rPr lang="en-US" sz="1200" dirty="0">
-                <a:latin typeface="Arial" panose="020B0604020202020204" pitchFamily="34" charset="0"/>
-                <a:cs typeface="Arial" panose="020B0604020202020204" pitchFamily="34" charset="0"/>
-              </a:rPr>
-              <a:t>Comment results, which is the safe radius, consider safe means less than 0.1 dB/90º.</a:t>
-            </a:r>
-          </a:p>
-          <a:p>
-            <a:pPr algn="just"/>
-            <a:endParaRPr lang="en-US" sz="1200" u="sng" dirty="0">
-              <a:latin typeface="Arial" panose="020B0604020202020204" pitchFamily="34" charset="0"/>
-              <a:cs typeface="Arial" panose="020B0604020202020204" pitchFamily="34" charset="0"/>
-            </a:endParaRPr>
-          </a:p>
-          <a:p>
-            <a:pPr algn="just"/>
-            <a:endParaRPr lang="en-US" sz="1200" dirty="0">
-              <a:latin typeface="Arial" panose="020B0604020202020204" pitchFamily="34" charset="0"/>
-              <a:cs typeface="Arial" panose="020B0604020202020204" pitchFamily="34" charset="0"/>
-            </a:endParaRPr>
-          </a:p>
-          <a:p>
-            <a:pPr algn="just"/>
-            <a:endParaRPr lang="en-US" sz="1200" dirty="0">
-              <a:latin typeface="Arial" panose="020B0604020202020204" pitchFamily="34" charset="0"/>
-              <a:cs typeface="Arial" panose="020B0604020202020204" pitchFamily="34" charset="0"/>
-            </a:endParaRPr>
-          </a:p>
-          <a:p>
-            <a:pPr algn="just"/>
-            <a:endParaRPr lang="en-US" sz="1200" dirty="0">
-              <a:latin typeface="Arial" panose="020B0604020202020204" pitchFamily="34" charset="0"/>
-              <a:cs typeface="Arial" panose="020B0604020202020204" pitchFamily="34" charset="0"/>
-            </a:endParaRPr>
-          </a:p>
-          <a:p>
-            <a:pPr algn="just"/>
-            <a:endParaRPr lang="en-US" sz="1200" dirty="0">
-              <a:latin typeface="Arial" panose="020B0604020202020204" pitchFamily="34" charset="0"/>
-              <a:cs typeface="Arial" panose="020B0604020202020204" pitchFamily="34" charset="0"/>
-            </a:endParaRPr>
-          </a:p>
-        </p:txBody>
-      </p:sp>
-      <mc:AlternateContent xmlns:mc="http://schemas.openxmlformats.org/markup-compatibility/2006">
-        <mc:Choice xmlns:a14="http://schemas.microsoft.com/office/drawing/2010/main" Requires="a14">
-          <p:sp>
-            <p:nvSpPr>
-              <p:cNvPr id="6" name="CuadroTexto 5">
-                <a:extLst>
-                  <a:ext uri="{FF2B5EF4-FFF2-40B4-BE49-F238E27FC236}">
-                    <a16:creationId xmlns:a16="http://schemas.microsoft.com/office/drawing/2014/main" id="{47B563D6-1B07-54C7-F3F3-F7AF0B20FF63}"/>
-                  </a:ext>
-                </a:extLst>
-              </p:cNvPr>
-              <p:cNvSpPr txBox="1"/>
-              <p:nvPr/>
-            </p:nvSpPr>
-            <p:spPr>
-              <a:xfrm>
-                <a:off x="10377883" y="3848100"/>
-                <a:ext cx="1856534" cy="439608"/>
-              </a:xfrm>
-              <a:prstGeom prst="rect">
-                <a:avLst/>
-              </a:prstGeom>
-              <a:noFill/>
-            </p:spPr>
-            <p:txBody>
-              <a:bodyPr wrap="none" lIns="0" tIns="0" rIns="0" bIns="0" rtlCol="0">
-                <a:spAutoFit/>
-              </a:bodyPr>
-              <a:lstStyle/>
-              <a:p>
-                <a14:m>
-                  <m:oMath xmlns:m="http://schemas.openxmlformats.org/officeDocument/2006/math">
-                    <m:r>
-                      <a:rPr lang="es-ES" sz="1800" b="0" i="1" smtClean="0">
-                        <a:latin typeface="Cambria Math" panose="02040503050406030204" pitchFamily="18" charset="0"/>
-                      </a:rPr>
-                      <m:t>𝛼</m:t>
-                    </m:r>
-                    <m:d>
-                      <m:dPr>
-                        <m:begChr m:val="["/>
-                        <m:endChr m:val="]"/>
-                        <m:ctrlPr>
-                          <a:rPr lang="es-ES" sz="1800" b="0" i="1" smtClean="0">
-                            <a:latin typeface="Cambria Math" panose="02040503050406030204" pitchFamily="18" charset="0"/>
-                          </a:rPr>
-                        </m:ctrlPr>
-                      </m:dPr>
-                      <m:e>
-                        <m:f>
-                          <m:fPr>
-                            <m:ctrlPr>
-                              <a:rPr lang="es-ES" sz="1800" b="0" i="1" smtClean="0">
-                                <a:latin typeface="Cambria Math" panose="02040503050406030204" pitchFamily="18" charset="0"/>
-                              </a:rPr>
-                            </m:ctrlPr>
-                          </m:fPr>
-                          <m:num>
-                            <m:r>
-                              <a:rPr lang="es-ES" sz="1800" b="0" i="1" smtClean="0">
-                                <a:latin typeface="Cambria Math" panose="02040503050406030204" pitchFamily="18" charset="0"/>
-                              </a:rPr>
-                              <m:t>𝑑𝐵</m:t>
-                            </m:r>
-                          </m:num>
-                          <m:den>
-                            <m:r>
-                              <a:rPr lang="es-ES" sz="1800" b="0" i="1" smtClean="0">
-                                <a:latin typeface="Cambria Math" panose="02040503050406030204" pitchFamily="18" charset="0"/>
-                              </a:rPr>
-                              <m:t>90</m:t>
-                            </m:r>
-                            <m:r>
-                              <a:rPr lang="es-ES" sz="1800" b="0" i="1" smtClean="0">
-                                <a:latin typeface="Cambria Math" panose="02040503050406030204" pitchFamily="18" charset="0"/>
-                                <a:ea typeface="Cambria Math" panose="02040503050406030204" pitchFamily="18" charset="0"/>
-                              </a:rPr>
-                              <m:t>°</m:t>
-                            </m:r>
-                          </m:den>
-                        </m:f>
-                      </m:e>
-                    </m:d>
-                    <m:r>
-                      <a:rPr lang="es-ES" sz="1800" b="0" i="1" smtClean="0">
-                        <a:latin typeface="Cambria Math" panose="02040503050406030204" pitchFamily="18" charset="0"/>
-                      </a:rPr>
-                      <m:t>=</m:t>
-                    </m:r>
-                  </m:oMath>
-                </a14:m>
-                <a:r>
-                  <a:rPr lang="es-ES" sz="1800" dirty="0"/>
-                  <a:t> </a:t>
-                </a:r>
-                <a14:m>
-                  <m:oMath xmlns:m="http://schemas.openxmlformats.org/officeDocument/2006/math">
-                    <m:r>
-                      <m:rPr>
-                        <m:sty m:val="p"/>
-                      </m:rPr>
-                      <a:rPr lang="es-ES" sz="1800" b="0" i="0" smtClean="0">
-                        <a:latin typeface="Cambria Math" panose="02040503050406030204" pitchFamily="18" charset="0"/>
-                      </a:rPr>
-                      <m:t>R</m:t>
-                    </m:r>
-                    <m:f>
-                      <m:fPr>
-                        <m:ctrlPr>
-                          <a:rPr lang="es-ES" sz="1800" b="0" i="1" smtClean="0">
-                            <a:latin typeface="Cambria Math" panose="02040503050406030204" pitchFamily="18" charset="0"/>
-                          </a:rPr>
-                        </m:ctrlPr>
-                      </m:fPr>
-                      <m:num>
-                        <m:r>
-                          <a:rPr lang="es-ES" sz="1800" b="0" i="1" smtClean="0">
-                            <a:latin typeface="Cambria Math" panose="02040503050406030204" pitchFamily="18" charset="0"/>
-                          </a:rPr>
-                          <m:t>𝜋</m:t>
-                        </m:r>
-                      </m:num>
-                      <m:den>
-                        <m:r>
-                          <a:rPr lang="es-ES" sz="1800" b="0" i="1" smtClean="0">
-                            <a:latin typeface="Cambria Math" panose="02040503050406030204" pitchFamily="18" charset="0"/>
-                          </a:rPr>
-                          <m:t>2</m:t>
-                        </m:r>
-                      </m:den>
-                    </m:f>
-                    <m:r>
-                      <a:rPr lang="es-ES" sz="1800" i="1">
-                        <a:latin typeface="Cambria Math" panose="02040503050406030204" pitchFamily="18" charset="0"/>
-                      </a:rPr>
-                      <m:t>𝛼</m:t>
-                    </m:r>
-                    <m:d>
-                      <m:dPr>
-                        <m:begChr m:val="["/>
-                        <m:endChr m:val="]"/>
-                        <m:ctrlPr>
-                          <a:rPr lang="es-ES" sz="1800" i="1">
-                            <a:latin typeface="Cambria Math" panose="02040503050406030204" pitchFamily="18" charset="0"/>
-                          </a:rPr>
-                        </m:ctrlPr>
-                      </m:dPr>
-                      <m:e>
-                        <m:f>
-                          <m:fPr>
-                            <m:ctrlPr>
-                              <a:rPr lang="es-ES" sz="1800" i="1">
-                                <a:latin typeface="Cambria Math" panose="02040503050406030204" pitchFamily="18" charset="0"/>
-                              </a:rPr>
-                            </m:ctrlPr>
-                          </m:fPr>
-                          <m:num>
-                            <m:r>
-                              <a:rPr lang="es-ES" sz="1800" i="1">
-                                <a:latin typeface="Cambria Math" panose="02040503050406030204" pitchFamily="18" charset="0"/>
-                              </a:rPr>
-                              <m:t>𝑑𝐵</m:t>
-                            </m:r>
-                          </m:num>
-                          <m:den>
-                            <m:r>
-                              <a:rPr lang="es-ES" sz="1800" i="1">
-                                <a:latin typeface="Cambria Math" panose="02040503050406030204" pitchFamily="18" charset="0"/>
-                              </a:rPr>
-                              <m:t>µ</m:t>
-                            </m:r>
-                            <m:r>
-                              <a:rPr lang="es-ES" sz="1800" i="1">
-                                <a:latin typeface="Cambria Math" panose="02040503050406030204" pitchFamily="18" charset="0"/>
-                              </a:rPr>
-                              <m:t>𝑚</m:t>
-                            </m:r>
-                          </m:den>
-                        </m:f>
-                      </m:e>
-                    </m:d>
-                  </m:oMath>
-                </a14:m>
-                <a:endParaRPr lang="en-US" sz="1800" dirty="0"/>
-              </a:p>
-            </p:txBody>
-          </p:sp>
-        </mc:Choice>
-        <mc:Fallback>
-          <p:sp>
-            <p:nvSpPr>
-              <p:cNvPr id="6" name="CuadroTexto 5">
-                <a:extLst>
-                  <a:ext uri="{FF2B5EF4-FFF2-40B4-BE49-F238E27FC236}">
-                    <a16:creationId xmlns:a16="http://schemas.microsoft.com/office/drawing/2014/main" id="{47B563D6-1B07-54C7-F3F3-F7AF0B20FF63}"/>
-                  </a:ext>
-                </a:extLst>
-              </p:cNvPr>
-              <p:cNvSpPr txBox="1">
-                <a:spLocks noRot="1" noChangeAspect="1" noMove="1" noResize="1" noEditPoints="1" noAdjustHandles="1" noChangeArrowheads="1" noChangeShapeType="1" noTextEdit="1"/>
-              </p:cNvSpPr>
-              <p:nvPr/>
-            </p:nvSpPr>
-            <p:spPr>
-              <a:xfrm>
-                <a:off x="10377883" y="3848100"/>
-                <a:ext cx="1856534" cy="439608"/>
-              </a:xfrm>
-              <a:prstGeom prst="rect">
-                <a:avLst/>
-              </a:prstGeom>
-              <a:blipFill>
-                <a:blip r:embed="rId5"/>
-                <a:stretch>
-                  <a:fillRect l="-3279" b="-13889"/>
-                </a:stretch>
-              </a:blipFill>
-            </p:spPr>
-            <p:txBody>
-              <a:bodyPr/>
-              <a:lstStyle/>
-              <a:p>
-                <a:r>
-                  <a:rPr lang="es-ES">
-                    <a:noFill/>
-                  </a:rPr>
-                  <a:t> </a:t>
-                </a:r>
-              </a:p>
-            </p:txBody>
-          </p:sp>
-        </mc:Fallback>
-      </mc:AlternateContent>
       <p:pic>
         <p:nvPicPr>
           <p:cNvPr id="5" name="Imagen 4" descr="Gráfico&#10;&#10;El contenido generado por IA puede ser incorrecto.">
@@ -10965,15 +11085,15 @@
           <p:nvPr/>
         </p:nvPicPr>
         <p:blipFill>
-          <a:blip r:embed="rId6"/>
+          <a:blip r:embed="rId5"/>
           <a:stretch>
             <a:fillRect/>
           </a:stretch>
         </p:blipFill>
         <p:spPr>
           <a:xfrm>
-            <a:off x="933847" y="1148427"/>
-            <a:ext cx="4837906" cy="3505200"/>
+            <a:off x="685800" y="1498925"/>
+            <a:ext cx="5257800" cy="3809425"/>
           </a:xfrm>
           <a:prstGeom prst="rect">
             <a:avLst/>
@@ -10995,15 +11115,15 @@
           <p:nvPr/>
         </p:nvPicPr>
         <p:blipFill>
-          <a:blip r:embed="rId7"/>
+          <a:blip r:embed="rId6"/>
           <a:stretch>
             <a:fillRect/>
           </a:stretch>
         </p:blipFill>
         <p:spPr>
           <a:xfrm>
-            <a:off x="5856030" y="1202722"/>
-            <a:ext cx="4507170" cy="3353055"/>
+            <a:off x="6281384" y="1395441"/>
+            <a:ext cx="5398826" cy="4016392"/>
           </a:xfrm>
           <a:prstGeom prst="rect">
             <a:avLst/>
@@ -11028,7 +11148,13 @@
   <p:cSld>
     <p:spTree>
       <p:nvGrpSpPr>
-        <p:cNvPr id="1" name=""/>
+        <p:cNvPr id="1" name="">
+          <a:extLst>
+            <a:ext uri="{FF2B5EF4-FFF2-40B4-BE49-F238E27FC236}">
+              <a16:creationId xmlns:a16="http://schemas.microsoft.com/office/drawing/2014/main" id="{6852B1FB-6397-1786-967D-D05B87550645}"/>
+            </a:ext>
+          </a:extLst>
+        </p:cNvPr>
         <p:cNvGrpSpPr/>
         <p:nvPr/>
       </p:nvGrpSpPr>
@@ -11042,36 +11168,13 @@
       </p:grpSpPr>
       <p:sp>
         <p:nvSpPr>
-          <p:cNvPr id="3" name="object 3"/>
-          <p:cNvSpPr/>
-          <p:nvPr/>
-        </p:nvSpPr>
-        <p:spPr>
-          <a:xfrm>
-            <a:off x="3945635" y="2636520"/>
-            <a:ext cx="8246363" cy="1584959"/>
-          </a:xfrm>
-          <a:prstGeom prst="rect">
-            <a:avLst/>
-          </a:prstGeom>
-          <a:blipFill>
-            <a:blip r:embed="rId2" cstate="print"/>
-            <a:stretch>
-              <a:fillRect/>
-            </a:stretch>
-          </a:blipFill>
-        </p:spPr>
-        <p:txBody>
-          <a:bodyPr wrap="square" lIns="0" tIns="0" rIns="0" bIns="0" rtlCol="0"/>
-          <a:lstStyle/>
-          <a:p>
-            <a:endParaRPr/>
-          </a:p>
-        </p:txBody>
-      </p:sp>
-      <p:sp>
-        <p:nvSpPr>
-          <p:cNvPr id="4" name="object 4"/>
+          <p:cNvPr id="16" name="object 16">
+            <a:extLst>
+              <a:ext uri="{FF2B5EF4-FFF2-40B4-BE49-F238E27FC236}">
+                <a16:creationId xmlns:a16="http://schemas.microsoft.com/office/drawing/2014/main" id="{7F1B2CCE-FBE8-6A14-5158-558470B8F148}"/>
+              </a:ext>
+            </a:extLst>
+          </p:cNvPr>
           <p:cNvSpPr txBox="1">
             <a:spLocks noGrp="1"/>
           </p:cNvSpPr>
@@ -11081,15 +11184,15 @@
         </p:nvSpPr>
         <p:spPr>
           <a:xfrm>
-            <a:off x="4513326" y="3165729"/>
-            <a:ext cx="2233295" cy="513715"/>
+            <a:off x="685800" y="408883"/>
+            <a:ext cx="10994410" cy="1090042"/>
           </a:xfrm>
           <a:prstGeom prst="rect">
             <a:avLst/>
           </a:prstGeom>
         </p:spPr>
         <p:txBody>
-          <a:bodyPr vert="horz" wrap="square" lIns="0" tIns="13335" rIns="0" bIns="0" rtlCol="0">
+          <a:bodyPr vert="horz" wrap="square" lIns="0" tIns="12700" rIns="0" bIns="0" rtlCol="0">
             <a:spAutoFit/>
           </a:bodyPr>
           <a:lstStyle/>
@@ -11099,52 +11202,80 @@
                 <a:spcPct val="100000"/>
               </a:lnSpc>
               <a:spcBef>
-                <a:spcPts val="105"/>
+                <a:spcPts val="100"/>
               </a:spcBef>
             </a:pPr>
             <a:r>
-              <a:rPr sz="3200" b="1" spc="-5" dirty="0">
-                <a:solidFill>
-                  <a:srgbClr val="FFFFFF"/>
-                </a:solidFill>
-                <a:latin typeface="Lucida Sans"/>
-                <a:cs typeface="Lucida Sans"/>
-              </a:rPr>
-              <a:t>Thank</a:t>
-            </a:r>
-            <a:r>
-              <a:rPr sz="3200" b="1" spc="-55" dirty="0">
-                <a:solidFill>
-                  <a:srgbClr val="FFFFFF"/>
-                </a:solidFill>
-                <a:latin typeface="Lucida Sans"/>
-                <a:cs typeface="Lucida Sans"/>
-              </a:rPr>
-              <a:t> </a:t>
-            </a:r>
-            <a:r>
-              <a:rPr sz="3200" b="1" dirty="0">
-                <a:solidFill>
-                  <a:srgbClr val="FFFFFF"/>
-                </a:solidFill>
-                <a:latin typeface="Lucida Sans"/>
-                <a:cs typeface="Lucida Sans"/>
-              </a:rPr>
-              <a:t>you</a:t>
-            </a:r>
-            <a:endParaRPr sz="3200">
-              <a:latin typeface="Lucida Sans"/>
+              <a:rPr lang="en-US" sz="2500" dirty="0"/>
+              <a:t>Learning outcome #4 – Bend waveguide radius vs. loss – deep TE0</a:t>
+            </a:r>
+            <a:br>
+              <a:rPr lang="en-US" sz="2500" dirty="0"/>
+            </a:br>
+            <a:r>
+              <a:rPr lang="en-US" b="0" dirty="0"/>
+              <a:t>Find  neff_TE0 for </a:t>
+            </a:r>
+            <a:r>
+              <a:rPr lang="en-US" b="0" dirty="0" err="1"/>
+              <a:t>wvl</a:t>
+            </a:r>
+            <a:r>
+              <a:rPr lang="en-US" b="0" dirty="0"/>
+              <a:t> 1.55 µm, width 1.0 µm for R=25,50,75,100, 125,150 µm</a:t>
+            </a:r>
+            <a:br>
+              <a:rPr lang="en-US" sz="2500" dirty="0"/>
+            </a:br>
+            <a:endParaRPr lang="en-US" sz="2500" b="0" dirty="0">
+              <a:latin typeface="+mj-lt"/>
               <a:cs typeface="Lucida Sans"/>
             </a:endParaRPr>
           </a:p>
         </p:txBody>
       </p:sp>
+      <p:pic>
+        <p:nvPicPr>
+          <p:cNvPr id="83" name="Gráfico 82">
+            <a:extLst>
+              <a:ext uri="{FF2B5EF4-FFF2-40B4-BE49-F238E27FC236}">
+                <a16:creationId xmlns:a16="http://schemas.microsoft.com/office/drawing/2014/main" id="{C6295097-5941-C4E4-9F5B-CCE1C3DF341A}"/>
+              </a:ext>
+            </a:extLst>
+          </p:cNvPr>
+          <p:cNvPicPr>
+            <a:picLocks noChangeAspect="1"/>
+          </p:cNvPicPr>
+          <p:nvPr/>
+        </p:nvPicPr>
+        <p:blipFill>
+          <a:blip r:embed="rId3">
+            <a:extLst>
+              <a:ext uri="{96DAC541-7B7A-43D3-8B79-37D633B846F1}">
+                <asvg:svgBlip xmlns:asvg="http://schemas.microsoft.com/office/drawing/2016/SVG/main" r:embed="rId4"/>
+              </a:ext>
+            </a:extLst>
+          </a:blip>
+          <a:stretch>
+            <a:fillRect/>
+          </a:stretch>
+        </p:blipFill>
+        <p:spPr>
+          <a:xfrm>
+            <a:off x="5045006" y="6356057"/>
+            <a:ext cx="6409575" cy="363174"/>
+          </a:xfrm>
+          <a:prstGeom prst="rect">
+            <a:avLst/>
+          </a:prstGeom>
+        </p:spPr>
+      </p:pic>
       <p:sp>
         <p:nvSpPr>
-          <p:cNvPr id="5" name="Marcador de número de diapositiva 4">
+          <p:cNvPr id="84" name="Marcador de número de diapositiva 83">
             <a:extLst>
               <a:ext uri="{FF2B5EF4-FFF2-40B4-BE49-F238E27FC236}">
-                <a16:creationId xmlns:a16="http://schemas.microsoft.com/office/drawing/2014/main" id="{B052DA19-AD24-7D24-2AE9-51F8F5A7F5E0}"/>
+                <a16:creationId xmlns:a16="http://schemas.microsoft.com/office/drawing/2014/main" id="{AD36091F-C426-AD9E-FED8-7429DDADFD59}"/>
               </a:ext>
             </a:extLst>
           </p:cNvPr>
@@ -11168,7 +11299,1613 @@
           </a:p>
         </p:txBody>
       </p:sp>
+      <p:sp>
+        <p:nvSpPr>
+          <p:cNvPr id="3" name="Marcador de pie de página 2">
+            <a:extLst>
+              <a:ext uri="{FF2B5EF4-FFF2-40B4-BE49-F238E27FC236}">
+                <a16:creationId xmlns:a16="http://schemas.microsoft.com/office/drawing/2014/main" id="{33D91341-E731-128B-74C3-54F2A3971328}"/>
+              </a:ext>
+            </a:extLst>
+          </p:cNvPr>
+          <p:cNvSpPr>
+            <a:spLocks noGrp="1"/>
+          </p:cNvSpPr>
+          <p:nvPr>
+            <p:ph type="ftr" sz="quarter" idx="5"/>
+          </p:nvPr>
+        </p:nvSpPr>
+        <p:spPr/>
+        <p:txBody>
+          <a:bodyPr/>
+          <a:lstStyle/>
+          <a:p>
+            <a:pPr marL="12700">
+              <a:spcBef>
+                <a:spcPts val="15"/>
+              </a:spcBef>
+            </a:pPr>
+            <a:r>
+              <a:rPr lang="es-ES" spc="-5"/>
+              <a:t>LAB 1.0. WAVEGUIDES</a:t>
+            </a:r>
+            <a:endParaRPr lang="es-ES" spc="-5" dirty="0"/>
+          </a:p>
+        </p:txBody>
+      </p:sp>
+      <p:sp>
+        <p:nvSpPr>
+          <p:cNvPr id="2" name="CuadroTexto 1">
+            <a:extLst>
+              <a:ext uri="{FF2B5EF4-FFF2-40B4-BE49-F238E27FC236}">
+                <a16:creationId xmlns:a16="http://schemas.microsoft.com/office/drawing/2014/main" id="{CA447E68-F4D6-DEC1-3C17-60C8A376030E}"/>
+              </a:ext>
+            </a:extLst>
+          </p:cNvPr>
+          <p:cNvSpPr txBox="1"/>
+          <p:nvPr/>
+        </p:nvSpPr>
+        <p:spPr>
+          <a:xfrm>
+            <a:off x="616527" y="1295400"/>
+            <a:ext cx="11199971" cy="646331"/>
+          </a:xfrm>
+          <a:prstGeom prst="rect">
+            <a:avLst/>
+          </a:prstGeom>
+          <a:solidFill>
+            <a:schemeClr val="bg1">
+              <a:lumMod val="95000"/>
+            </a:schemeClr>
+          </a:solidFill>
+          <a:ln w="28575">
+            <a:solidFill>
+              <a:srgbClr val="E0700D"/>
+            </a:solidFill>
+          </a:ln>
+        </p:spPr>
+        <p:txBody>
+          <a:bodyPr wrap="square" rtlCol="0">
+            <a:spAutoFit/>
+          </a:bodyPr>
+          <a:lstStyle/>
+          <a:p>
+            <a:pPr algn="just"/>
+            <a:r>
+              <a:rPr lang="en-US" sz="1200" dirty="0" err="1">
+                <a:latin typeface="Arial" panose="020B0604020202020204" pitchFamily="34" charset="0"/>
+                <a:cs typeface="Arial" panose="020B0604020202020204" pitchFamily="34" charset="0"/>
+              </a:rPr>
+              <a:t>Observando</a:t>
+            </a:r>
+            <a:r>
+              <a:rPr lang="en-US" sz="1200" dirty="0">
+                <a:latin typeface="Arial" panose="020B0604020202020204" pitchFamily="34" charset="0"/>
+                <a:cs typeface="Arial" panose="020B0604020202020204" pitchFamily="34" charset="0"/>
+              </a:rPr>
+              <a:t> </a:t>
+            </a:r>
+            <a:r>
+              <a:rPr lang="en-US" sz="1200" dirty="0" err="1">
+                <a:latin typeface="Arial" panose="020B0604020202020204" pitchFamily="34" charset="0"/>
+                <a:cs typeface="Arial" panose="020B0604020202020204" pitchFamily="34" charset="0"/>
+              </a:rPr>
+              <a:t>el</a:t>
+            </a:r>
+            <a:r>
+              <a:rPr lang="en-US" sz="1200" dirty="0">
+                <a:latin typeface="Arial" panose="020B0604020202020204" pitchFamily="34" charset="0"/>
+                <a:cs typeface="Arial" panose="020B0604020202020204" pitchFamily="34" charset="0"/>
+              </a:rPr>
+              <a:t> </a:t>
+            </a:r>
+            <a:r>
+              <a:rPr lang="en-US" sz="1200" dirty="0" err="1">
+                <a:latin typeface="Arial" panose="020B0604020202020204" pitchFamily="34" charset="0"/>
+                <a:cs typeface="Arial" panose="020B0604020202020204" pitchFamily="34" charset="0"/>
+              </a:rPr>
+              <a:t>comportamiento</a:t>
+            </a:r>
+            <a:r>
+              <a:rPr lang="en-US" sz="1200" dirty="0">
+                <a:latin typeface="Arial" panose="020B0604020202020204" pitchFamily="34" charset="0"/>
+                <a:cs typeface="Arial" panose="020B0604020202020204" pitchFamily="34" charset="0"/>
+              </a:rPr>
+              <a:t> de la </a:t>
+            </a:r>
+            <a:r>
+              <a:rPr lang="en-US" sz="1200" dirty="0" err="1">
+                <a:latin typeface="Arial" panose="020B0604020202020204" pitchFamily="34" charset="0"/>
+                <a:cs typeface="Arial" panose="020B0604020202020204" pitchFamily="34" charset="0"/>
+              </a:rPr>
+              <a:t>suma</a:t>
+            </a:r>
+            <a:r>
+              <a:rPr lang="en-US" sz="1200" dirty="0">
+                <a:latin typeface="Arial" panose="020B0604020202020204" pitchFamily="34" charset="0"/>
+                <a:cs typeface="Arial" panose="020B0604020202020204" pitchFamily="34" charset="0"/>
+              </a:rPr>
+              <a:t> de las </a:t>
+            </a:r>
+            <a:r>
+              <a:rPr lang="en-US" sz="1200" dirty="0" err="1">
+                <a:latin typeface="Arial" panose="020B0604020202020204" pitchFamily="34" charset="0"/>
+                <a:cs typeface="Arial" panose="020B0604020202020204" pitchFamily="34" charset="0"/>
+              </a:rPr>
+              <a:t>pérdidas</a:t>
+            </a:r>
+            <a:r>
+              <a:rPr lang="en-US" sz="1200" dirty="0">
+                <a:latin typeface="Arial" panose="020B0604020202020204" pitchFamily="34" charset="0"/>
+                <a:cs typeface="Arial" panose="020B0604020202020204" pitchFamily="34" charset="0"/>
+              </a:rPr>
+              <a:t>, </a:t>
+            </a:r>
+            <a:r>
+              <a:rPr lang="en-US" sz="1200" dirty="0" err="1">
+                <a:latin typeface="Arial" panose="020B0604020202020204" pitchFamily="34" charset="0"/>
+                <a:cs typeface="Arial" panose="020B0604020202020204" pitchFamily="34" charset="0"/>
+              </a:rPr>
+              <a:t>considerando</a:t>
+            </a:r>
+            <a:r>
+              <a:rPr lang="en-US" sz="1200" dirty="0">
+                <a:latin typeface="Arial" panose="020B0604020202020204" pitchFamily="34" charset="0"/>
+                <a:cs typeface="Arial" panose="020B0604020202020204" pitchFamily="34" charset="0"/>
+              </a:rPr>
+              <a:t> </a:t>
+            </a:r>
+            <a:r>
+              <a:rPr lang="en-US" sz="1200" dirty="0" err="1">
+                <a:latin typeface="Arial" panose="020B0604020202020204" pitchFamily="34" charset="0"/>
+                <a:cs typeface="Arial" panose="020B0604020202020204" pitchFamily="34" charset="0"/>
+              </a:rPr>
+              <a:t>que</a:t>
+            </a:r>
+            <a:r>
+              <a:rPr lang="en-US" sz="1200" dirty="0">
+                <a:latin typeface="Arial" panose="020B0604020202020204" pitchFamily="34" charset="0"/>
+                <a:cs typeface="Arial" panose="020B0604020202020204" pitchFamily="34" charset="0"/>
+              </a:rPr>
+              <a:t> temenos </a:t>
+            </a:r>
+            <a:r>
+              <a:rPr lang="en-US" sz="1200" dirty="0" err="1">
+                <a:latin typeface="Arial" panose="020B0604020202020204" pitchFamily="34" charset="0"/>
+                <a:cs typeface="Arial" panose="020B0604020202020204" pitchFamily="34" charset="0"/>
+              </a:rPr>
+              <a:t>que</a:t>
+            </a:r>
+            <a:r>
+              <a:rPr lang="en-US" sz="1200" dirty="0">
+                <a:latin typeface="Arial" panose="020B0604020202020204" pitchFamily="34" charset="0"/>
+                <a:cs typeface="Arial" panose="020B0604020202020204" pitchFamily="34" charset="0"/>
+              </a:rPr>
+              <a:t> </a:t>
+            </a:r>
+            <a:r>
+              <a:rPr lang="en-US" sz="1200" dirty="0" err="1">
+                <a:latin typeface="Arial" panose="020B0604020202020204" pitchFamily="34" charset="0"/>
+                <a:cs typeface="Arial" panose="020B0604020202020204" pitchFamily="34" charset="0"/>
+              </a:rPr>
+              <a:t>estar</a:t>
+            </a:r>
+            <a:r>
+              <a:rPr lang="en-US" sz="1200" dirty="0">
+                <a:latin typeface="Arial" panose="020B0604020202020204" pitchFamily="34" charset="0"/>
+                <a:cs typeface="Arial" panose="020B0604020202020204" pitchFamily="34" charset="0"/>
+              </a:rPr>
+              <a:t> </a:t>
+            </a:r>
+            <a:r>
+              <a:rPr lang="en-US" sz="1200" dirty="0" err="1">
+                <a:latin typeface="Arial" panose="020B0604020202020204" pitchFamily="34" charset="0"/>
+                <a:cs typeface="Arial" panose="020B0604020202020204" pitchFamily="34" charset="0"/>
+              </a:rPr>
+              <a:t>por</a:t>
+            </a:r>
+            <a:r>
+              <a:rPr lang="en-US" sz="1200" dirty="0">
+                <a:latin typeface="Arial" panose="020B0604020202020204" pitchFamily="34" charset="0"/>
+                <a:cs typeface="Arial" panose="020B0604020202020204" pitchFamily="34" charset="0"/>
+              </a:rPr>
+              <a:t> </a:t>
+            </a:r>
+            <a:r>
+              <a:rPr lang="en-US" sz="1200" dirty="0" err="1">
+                <a:latin typeface="Arial" panose="020B0604020202020204" pitchFamily="34" charset="0"/>
+                <a:cs typeface="Arial" panose="020B0604020202020204" pitchFamily="34" charset="0"/>
+              </a:rPr>
+              <a:t>debajo</a:t>
+            </a:r>
+            <a:r>
+              <a:rPr lang="en-US" sz="1200" dirty="0">
+                <a:latin typeface="Arial" panose="020B0604020202020204" pitchFamily="34" charset="0"/>
+                <a:cs typeface="Arial" panose="020B0604020202020204" pitchFamily="34" charset="0"/>
+              </a:rPr>
+              <a:t> de 0.1 dB, </a:t>
+            </a:r>
+            <a:r>
+              <a:rPr lang="en-US" sz="1200" dirty="0" err="1">
+                <a:latin typeface="Arial" panose="020B0604020202020204" pitchFamily="34" charset="0"/>
+                <a:cs typeface="Arial" panose="020B0604020202020204" pitchFamily="34" charset="0"/>
+              </a:rPr>
+              <a:t>podríamos</a:t>
+            </a:r>
+            <a:r>
+              <a:rPr lang="en-US" sz="1200" dirty="0">
+                <a:latin typeface="Arial" panose="020B0604020202020204" pitchFamily="34" charset="0"/>
+                <a:cs typeface="Arial" panose="020B0604020202020204" pitchFamily="34" charset="0"/>
+              </a:rPr>
+              <a:t> considerer </a:t>
+            </a:r>
+            <a:r>
+              <a:rPr lang="en-US" sz="1200" dirty="0" err="1">
+                <a:latin typeface="Arial" panose="020B0604020202020204" pitchFamily="34" charset="0"/>
+                <a:cs typeface="Arial" panose="020B0604020202020204" pitchFamily="34" charset="0"/>
+              </a:rPr>
+              <a:t>aptas</a:t>
+            </a:r>
+            <a:r>
+              <a:rPr lang="en-US" sz="1200" dirty="0">
+                <a:latin typeface="Arial" panose="020B0604020202020204" pitchFamily="34" charset="0"/>
+                <a:cs typeface="Arial" panose="020B0604020202020204" pitchFamily="34" charset="0"/>
+              </a:rPr>
+              <a:t> las </a:t>
+            </a:r>
+            <a:r>
+              <a:rPr lang="en-US" sz="1200" dirty="0" err="1">
+                <a:latin typeface="Arial" panose="020B0604020202020204" pitchFamily="34" charset="0"/>
+                <a:cs typeface="Arial" panose="020B0604020202020204" pitchFamily="34" charset="0"/>
+              </a:rPr>
+              <a:t>pérdidas</a:t>
+            </a:r>
+            <a:endParaRPr lang="en-US" sz="1200" dirty="0">
+              <a:latin typeface="Arial" panose="020B0604020202020204" pitchFamily="34" charset="0"/>
+              <a:cs typeface="Arial" panose="020B0604020202020204" pitchFamily="34" charset="0"/>
+            </a:endParaRPr>
+          </a:p>
+          <a:p>
+            <a:pPr algn="just"/>
+            <a:r>
+              <a:rPr lang="en-US" sz="1200" dirty="0">
+                <a:latin typeface="Arial" panose="020B0604020202020204" pitchFamily="34" charset="0"/>
+                <a:cs typeface="Arial" panose="020B0604020202020204" pitchFamily="34" charset="0"/>
+              </a:rPr>
+              <a:t>a </a:t>
+            </a:r>
+            <a:r>
+              <a:rPr lang="en-US" sz="1200" dirty="0" err="1">
+                <a:latin typeface="Arial" panose="020B0604020202020204" pitchFamily="34" charset="0"/>
+                <a:cs typeface="Arial" panose="020B0604020202020204" pitchFamily="34" charset="0"/>
+              </a:rPr>
+              <a:t>partir</a:t>
+            </a:r>
+            <a:r>
+              <a:rPr lang="en-US" sz="1200" dirty="0">
+                <a:latin typeface="Arial" panose="020B0604020202020204" pitchFamily="34" charset="0"/>
+                <a:cs typeface="Arial" panose="020B0604020202020204" pitchFamily="34" charset="0"/>
+              </a:rPr>
+              <a:t> de un radio de 30um,  </a:t>
+            </a:r>
+            <a:r>
+              <a:rPr lang="en-US" sz="1200" dirty="0" err="1">
+                <a:latin typeface="Arial" panose="020B0604020202020204" pitchFamily="34" charset="0"/>
+                <a:cs typeface="Arial" panose="020B0604020202020204" pitchFamily="34" charset="0"/>
+              </a:rPr>
+              <a:t>siendo</a:t>
+            </a:r>
+            <a:r>
+              <a:rPr lang="en-US" sz="1200" dirty="0">
+                <a:latin typeface="Arial" panose="020B0604020202020204" pitchFamily="34" charset="0"/>
+                <a:cs typeface="Arial" panose="020B0604020202020204" pitchFamily="34" charset="0"/>
+              </a:rPr>
+              <a:t> </a:t>
+            </a:r>
+            <a:r>
+              <a:rPr lang="en-US" sz="1200" dirty="0" err="1">
+                <a:latin typeface="Arial" panose="020B0604020202020204" pitchFamily="34" charset="0"/>
+                <a:cs typeface="Arial" panose="020B0604020202020204" pitchFamily="34" charset="0"/>
+              </a:rPr>
+              <a:t>el</a:t>
+            </a:r>
+            <a:r>
+              <a:rPr lang="en-US" sz="1200" dirty="0">
+                <a:latin typeface="Arial" panose="020B0604020202020204" pitchFamily="34" charset="0"/>
+                <a:cs typeface="Arial" panose="020B0604020202020204" pitchFamily="34" charset="0"/>
+              </a:rPr>
+              <a:t> </a:t>
+            </a:r>
+            <a:r>
+              <a:rPr lang="en-US" sz="1200" dirty="0" err="1">
+                <a:latin typeface="Arial" panose="020B0604020202020204" pitchFamily="34" charset="0"/>
+                <a:cs typeface="Arial" panose="020B0604020202020204" pitchFamily="34" charset="0"/>
+              </a:rPr>
+              <a:t>rango</a:t>
+            </a:r>
+            <a:r>
+              <a:rPr lang="en-US" sz="1200" dirty="0">
+                <a:latin typeface="Arial" panose="020B0604020202020204" pitchFamily="34" charset="0"/>
+                <a:cs typeface="Arial" panose="020B0604020202020204" pitchFamily="34" charset="0"/>
+              </a:rPr>
+              <a:t> </a:t>
+            </a:r>
+            <a:r>
+              <a:rPr lang="en-US" sz="1200" dirty="0" err="1">
+                <a:latin typeface="Arial" panose="020B0604020202020204" pitchFamily="34" charset="0"/>
+                <a:cs typeface="Arial" panose="020B0604020202020204" pitchFamily="34" charset="0"/>
+              </a:rPr>
+              <a:t>donde</a:t>
+            </a:r>
+            <a:r>
+              <a:rPr lang="en-US" sz="1200" dirty="0">
+                <a:latin typeface="Arial" panose="020B0604020202020204" pitchFamily="34" charset="0"/>
+                <a:cs typeface="Arial" panose="020B0604020202020204" pitchFamily="34" charset="0"/>
+              </a:rPr>
+              <a:t> temenos </a:t>
+            </a:r>
+            <a:r>
+              <a:rPr lang="en-US" sz="1200" dirty="0" err="1">
+                <a:latin typeface="Arial" panose="020B0604020202020204" pitchFamily="34" charset="0"/>
+                <a:cs typeface="Arial" panose="020B0604020202020204" pitchFamily="34" charset="0"/>
+              </a:rPr>
+              <a:t>el</a:t>
+            </a:r>
+            <a:r>
+              <a:rPr lang="en-US" sz="1200" dirty="0">
+                <a:latin typeface="Arial" panose="020B0604020202020204" pitchFamily="34" charset="0"/>
+                <a:cs typeface="Arial" panose="020B0604020202020204" pitchFamily="34" charset="0"/>
+              </a:rPr>
+              <a:t> </a:t>
+            </a:r>
+            <a:r>
+              <a:rPr lang="en-US" sz="1200" dirty="0" err="1">
+                <a:latin typeface="Arial" panose="020B0604020202020204" pitchFamily="34" charset="0"/>
+                <a:cs typeface="Arial" panose="020B0604020202020204" pitchFamily="34" charset="0"/>
+              </a:rPr>
+              <a:t>mínimo</a:t>
+            </a:r>
+            <a:r>
+              <a:rPr lang="en-US" sz="1200" dirty="0">
+                <a:latin typeface="Arial" panose="020B0604020202020204" pitchFamily="34" charset="0"/>
+                <a:cs typeface="Arial" panose="020B0604020202020204" pitchFamily="34" charset="0"/>
+              </a:rPr>
+              <a:t> de </a:t>
+            </a:r>
+            <a:r>
+              <a:rPr lang="en-US" sz="1200" dirty="0" err="1">
+                <a:latin typeface="Arial" panose="020B0604020202020204" pitchFamily="34" charset="0"/>
+                <a:cs typeface="Arial" panose="020B0604020202020204" pitchFamily="34" charset="0"/>
+              </a:rPr>
+              <a:t>pérdidas</a:t>
+            </a:r>
+            <a:r>
+              <a:rPr lang="en-US" sz="1200" dirty="0">
+                <a:latin typeface="Arial" panose="020B0604020202020204" pitchFamily="34" charset="0"/>
+                <a:cs typeface="Arial" panose="020B0604020202020204" pitchFamily="34" charset="0"/>
+              </a:rPr>
+              <a:t> </a:t>
+            </a:r>
+            <a:r>
+              <a:rPr lang="en-US" sz="1200" dirty="0" err="1">
+                <a:latin typeface="Arial" panose="020B0604020202020204" pitchFamily="34" charset="0"/>
+                <a:cs typeface="Arial" panose="020B0604020202020204" pitchFamily="34" charset="0"/>
+              </a:rPr>
+              <a:t>alrededor</a:t>
+            </a:r>
+            <a:r>
+              <a:rPr lang="en-US" sz="1200" dirty="0">
+                <a:latin typeface="Arial" panose="020B0604020202020204" pitchFamily="34" charset="0"/>
+                <a:cs typeface="Arial" panose="020B0604020202020204" pitchFamily="34" charset="0"/>
+              </a:rPr>
+              <a:t> de </a:t>
+            </a:r>
+            <a:r>
+              <a:rPr lang="en-US" sz="1200" dirty="0" err="1">
+                <a:latin typeface="Arial" panose="020B0604020202020204" pitchFamily="34" charset="0"/>
+                <a:cs typeface="Arial" panose="020B0604020202020204" pitchFamily="34" charset="0"/>
+              </a:rPr>
+              <a:t>los</a:t>
+            </a:r>
+            <a:r>
+              <a:rPr lang="en-US" sz="1200" dirty="0">
+                <a:latin typeface="Arial" panose="020B0604020202020204" pitchFamily="34" charset="0"/>
+                <a:cs typeface="Arial" panose="020B0604020202020204" pitchFamily="34" charset="0"/>
+              </a:rPr>
+              <a:t> 70um. </a:t>
+            </a:r>
+          </a:p>
+          <a:p>
+            <a:pPr algn="just"/>
+            <a:endParaRPr lang="en-US" sz="1200" dirty="0">
+              <a:latin typeface="Arial" panose="020B0604020202020204" pitchFamily="34" charset="0"/>
+              <a:cs typeface="Arial" panose="020B0604020202020204" pitchFamily="34" charset="0"/>
+            </a:endParaRPr>
+          </a:p>
+        </p:txBody>
+      </p:sp>
+      <p:pic>
+        <p:nvPicPr>
+          <p:cNvPr id="7" name="Imagen 6" descr="Gráfico&#10;&#10;El contenido generado por IA puede ser incorrecto.">
+            <a:extLst>
+              <a:ext uri="{FF2B5EF4-FFF2-40B4-BE49-F238E27FC236}">
+                <a16:creationId xmlns:a16="http://schemas.microsoft.com/office/drawing/2014/main" id="{48E19186-2A83-1A13-0204-F37C76919124}"/>
+              </a:ext>
+            </a:extLst>
+          </p:cNvPr>
+          <p:cNvPicPr>
+            <a:picLocks noChangeAspect="1"/>
+          </p:cNvPicPr>
+          <p:nvPr/>
+        </p:nvPicPr>
+        <p:blipFill>
+          <a:blip r:embed="rId5"/>
+          <a:stretch>
+            <a:fillRect/>
+          </a:stretch>
+        </p:blipFill>
+        <p:spPr>
+          <a:xfrm>
+            <a:off x="872913" y="2289971"/>
+            <a:ext cx="5243869" cy="3474138"/>
+          </a:xfrm>
+          <a:prstGeom prst="rect">
+            <a:avLst/>
+          </a:prstGeom>
+        </p:spPr>
+      </p:pic>
+      <p:sp>
+        <p:nvSpPr>
+          <p:cNvPr id="9" name="CuadroTexto 8">
+            <a:extLst>
+              <a:ext uri="{FF2B5EF4-FFF2-40B4-BE49-F238E27FC236}">
+                <a16:creationId xmlns:a16="http://schemas.microsoft.com/office/drawing/2014/main" id="{FA2C9798-8010-F51E-CE0C-365672D686AF}"/>
+              </a:ext>
+            </a:extLst>
+          </p:cNvPr>
+          <p:cNvSpPr txBox="1"/>
+          <p:nvPr/>
+        </p:nvSpPr>
+        <p:spPr>
+          <a:xfrm>
+            <a:off x="2121467" y="2265347"/>
+            <a:ext cx="6128326" cy="369332"/>
+          </a:xfrm>
+          <a:prstGeom prst="rect">
+            <a:avLst/>
+          </a:prstGeom>
+          <a:noFill/>
+        </p:spPr>
+        <p:txBody>
+          <a:bodyPr wrap="square">
+            <a:spAutoFit/>
+          </a:bodyPr>
+          <a:lstStyle/>
+          <a:p>
+            <a:r>
+              <a:rPr lang="en-US" sz="1800" dirty="0">
+                <a:latin typeface="Arial" panose="020B0604020202020204" pitchFamily="34" charset="0"/>
+                <a:cs typeface="Arial" panose="020B0604020202020204" pitchFamily="34" charset="0"/>
+              </a:rPr>
+              <a:t>Modo TE0 R=20um</a:t>
+            </a:r>
+            <a:endParaRPr lang="es-ES" dirty="0"/>
+          </a:p>
+        </p:txBody>
+      </p:sp>
+      <p:sp>
+        <p:nvSpPr>
+          <p:cNvPr id="12" name="CuadroTexto 11">
+            <a:extLst>
+              <a:ext uri="{FF2B5EF4-FFF2-40B4-BE49-F238E27FC236}">
+                <a16:creationId xmlns:a16="http://schemas.microsoft.com/office/drawing/2014/main" id="{693CED9B-58E1-36F7-65B7-1F8AB73C12B5}"/>
+              </a:ext>
+            </a:extLst>
+          </p:cNvPr>
+          <p:cNvSpPr txBox="1"/>
+          <p:nvPr/>
+        </p:nvSpPr>
+        <p:spPr>
+          <a:xfrm>
+            <a:off x="6324600" y="3604700"/>
+            <a:ext cx="6128326" cy="646331"/>
+          </a:xfrm>
+          <a:prstGeom prst="rect">
+            <a:avLst/>
+          </a:prstGeom>
+          <a:noFill/>
+        </p:spPr>
+        <p:txBody>
+          <a:bodyPr wrap="square">
+            <a:spAutoFit/>
+          </a:bodyPr>
+          <a:lstStyle/>
+          <a:p>
+            <a:r>
+              <a:rPr lang="en-US" sz="1800" dirty="0">
+                <a:latin typeface="Arial" panose="020B0604020202020204" pitchFamily="34" charset="0"/>
+                <a:cs typeface="Arial" panose="020B0604020202020204" pitchFamily="34" charset="0"/>
+              </a:rPr>
+              <a:t>Ver </a:t>
+            </a:r>
+            <a:r>
+              <a:rPr lang="en-US" sz="1800" dirty="0" err="1">
+                <a:latin typeface="Arial" panose="020B0604020202020204" pitchFamily="34" charset="0"/>
+                <a:cs typeface="Arial" panose="020B0604020202020204" pitchFamily="34" charset="0"/>
+              </a:rPr>
+              <a:t>el</a:t>
+            </a:r>
+            <a:r>
+              <a:rPr lang="en-US" sz="1800" dirty="0">
+                <a:latin typeface="Arial" panose="020B0604020202020204" pitchFamily="34" charset="0"/>
+                <a:cs typeface="Arial" panose="020B0604020202020204" pitchFamily="34" charset="0"/>
+              </a:rPr>
+              <a:t> modo TE0 </a:t>
+            </a:r>
+            <a:r>
+              <a:rPr lang="en-US" sz="1800" dirty="0" err="1">
+                <a:latin typeface="Arial" panose="020B0604020202020204" pitchFamily="34" charset="0"/>
+                <a:cs typeface="Arial" panose="020B0604020202020204" pitchFamily="34" charset="0"/>
+              </a:rPr>
+              <a:t>nos</a:t>
+            </a:r>
+            <a:r>
+              <a:rPr lang="en-US" sz="1800" dirty="0">
+                <a:latin typeface="Arial" panose="020B0604020202020204" pitchFamily="34" charset="0"/>
+                <a:cs typeface="Arial" panose="020B0604020202020204" pitchFamily="34" charset="0"/>
+              </a:rPr>
+              <a:t> </a:t>
+            </a:r>
+            <a:r>
+              <a:rPr lang="en-US" sz="1800" dirty="0" err="1">
+                <a:latin typeface="Arial" panose="020B0604020202020204" pitchFamily="34" charset="0"/>
+                <a:cs typeface="Arial" panose="020B0604020202020204" pitchFamily="34" charset="0"/>
+              </a:rPr>
+              <a:t>ayudará</a:t>
+            </a:r>
+            <a:r>
+              <a:rPr lang="en-US" sz="1800" dirty="0">
+                <a:latin typeface="Arial" panose="020B0604020202020204" pitchFamily="34" charset="0"/>
+                <a:cs typeface="Arial" panose="020B0604020202020204" pitchFamily="34" charset="0"/>
+              </a:rPr>
+              <a:t> a </a:t>
+            </a:r>
+            <a:r>
+              <a:rPr lang="en-US" sz="1800" dirty="0" err="1">
+                <a:latin typeface="Arial" panose="020B0604020202020204" pitchFamily="34" charset="0"/>
+                <a:cs typeface="Arial" panose="020B0604020202020204" pitchFamily="34" charset="0"/>
+              </a:rPr>
+              <a:t>ver</a:t>
+            </a:r>
+            <a:r>
+              <a:rPr lang="en-US" sz="1800" dirty="0">
+                <a:latin typeface="Arial" panose="020B0604020202020204" pitchFamily="34" charset="0"/>
+                <a:cs typeface="Arial" panose="020B0604020202020204" pitchFamily="34" charset="0"/>
+              </a:rPr>
+              <a:t> la </a:t>
+            </a:r>
+            <a:r>
+              <a:rPr lang="en-US" sz="1800" dirty="0" err="1">
+                <a:latin typeface="Arial" panose="020B0604020202020204" pitchFamily="34" charset="0"/>
+                <a:cs typeface="Arial" panose="020B0604020202020204" pitchFamily="34" charset="0"/>
+              </a:rPr>
+              <a:t>diferencia</a:t>
+            </a:r>
+            <a:r>
+              <a:rPr lang="en-US" sz="1800" dirty="0">
+                <a:latin typeface="Arial" panose="020B0604020202020204" pitchFamily="34" charset="0"/>
+                <a:cs typeface="Arial" panose="020B0604020202020204" pitchFamily="34" charset="0"/>
+              </a:rPr>
+              <a:t> con </a:t>
+            </a:r>
+            <a:r>
+              <a:rPr lang="en-US" sz="1800" dirty="0" err="1">
+                <a:latin typeface="Arial" panose="020B0604020202020204" pitchFamily="34" charset="0"/>
+                <a:cs typeface="Arial" panose="020B0604020202020204" pitchFamily="34" charset="0"/>
+              </a:rPr>
+              <a:t>el</a:t>
+            </a:r>
+            <a:r>
+              <a:rPr lang="en-US" sz="1800" dirty="0">
+                <a:latin typeface="Arial" panose="020B0604020202020204" pitchFamily="34" charset="0"/>
+                <a:cs typeface="Arial" panose="020B0604020202020204" pitchFamily="34" charset="0"/>
+              </a:rPr>
+              <a:t> modo TM0 </a:t>
+            </a:r>
+            <a:r>
+              <a:rPr lang="en-US" sz="1800" dirty="0" err="1">
+                <a:latin typeface="Arial" panose="020B0604020202020204" pitchFamily="34" charset="0"/>
+                <a:cs typeface="Arial" panose="020B0604020202020204" pitchFamily="34" charset="0"/>
+              </a:rPr>
+              <a:t>posteriormente</a:t>
+            </a:r>
+            <a:r>
+              <a:rPr lang="en-US" sz="1800" dirty="0">
+                <a:latin typeface="Arial" panose="020B0604020202020204" pitchFamily="34" charset="0"/>
+                <a:cs typeface="Arial" panose="020B0604020202020204" pitchFamily="34" charset="0"/>
+              </a:rPr>
+              <a:t>. </a:t>
+            </a:r>
+            <a:endParaRPr lang="es-ES" dirty="0"/>
+          </a:p>
+        </p:txBody>
+      </p:sp>
     </p:spTree>
+    <p:extLst>
+      <p:ext uri="{BB962C8B-B14F-4D97-AF65-F5344CB8AC3E}">
+        <p14:creationId xmlns:p14="http://schemas.microsoft.com/office/powerpoint/2010/main" val="1463663"/>
+      </p:ext>
+    </p:extLst>
+  </p:cSld>
+  <p:clrMapOvr>
+    <a:masterClrMapping/>
+  </p:clrMapOvr>
+</p:sld>
+</file>
+
+<file path=ppt/slides/slide18.xml><?xml version="1.0" encoding="utf-8"?>
+<p:sld xmlns:a="http://schemas.openxmlformats.org/drawingml/2006/main" xmlns:r="http://schemas.openxmlformats.org/officeDocument/2006/relationships" xmlns:p="http://schemas.openxmlformats.org/presentationml/2006/main">
+  <p:cSld>
+    <p:spTree>
+      <p:nvGrpSpPr>
+        <p:cNvPr id="1" name="">
+          <a:extLst>
+            <a:ext uri="{FF2B5EF4-FFF2-40B4-BE49-F238E27FC236}">
+              <a16:creationId xmlns:a16="http://schemas.microsoft.com/office/drawing/2014/main" id="{0086AD69-DAA6-1AE7-7C01-C97649BDE5ED}"/>
+            </a:ext>
+          </a:extLst>
+        </p:cNvPr>
+        <p:cNvGrpSpPr/>
+        <p:nvPr/>
+      </p:nvGrpSpPr>
+      <p:grpSpPr>
+        <a:xfrm>
+          <a:off x="0" y="0"/>
+          <a:ext cx="0" cy="0"/>
+          <a:chOff x="0" y="0"/>
+          <a:chExt cx="0" cy="0"/>
+        </a:xfrm>
+      </p:grpSpPr>
+      <p:sp>
+        <p:nvSpPr>
+          <p:cNvPr id="16" name="object 16">
+            <a:extLst>
+              <a:ext uri="{FF2B5EF4-FFF2-40B4-BE49-F238E27FC236}">
+                <a16:creationId xmlns:a16="http://schemas.microsoft.com/office/drawing/2014/main" id="{9FA2370A-9A9A-4596-5161-98C6B4CDB7E1}"/>
+              </a:ext>
+            </a:extLst>
+          </p:cNvPr>
+          <p:cNvSpPr txBox="1">
+            <a:spLocks noGrp="1"/>
+          </p:cNvSpPr>
+          <p:nvPr>
+            <p:ph type="title"/>
+          </p:nvPr>
+        </p:nvSpPr>
+        <p:spPr>
+          <a:xfrm>
+            <a:off x="685800" y="408883"/>
+            <a:ext cx="10994410" cy="1090042"/>
+          </a:xfrm>
+          <a:prstGeom prst="rect">
+            <a:avLst/>
+          </a:prstGeom>
+        </p:spPr>
+        <p:txBody>
+          <a:bodyPr vert="horz" wrap="square" lIns="0" tIns="12700" rIns="0" bIns="0" rtlCol="0">
+            <a:spAutoFit/>
+          </a:bodyPr>
+          <a:lstStyle/>
+          <a:p>
+            <a:pPr marL="12700">
+              <a:lnSpc>
+                <a:spcPct val="100000"/>
+              </a:lnSpc>
+              <a:spcBef>
+                <a:spcPts val="100"/>
+              </a:spcBef>
+            </a:pPr>
+            <a:r>
+              <a:rPr lang="en-US" sz="2500" dirty="0"/>
+              <a:t>Learning outcome #4 – Bend waveguide radius vs. loss – deep TM0</a:t>
+            </a:r>
+            <a:br>
+              <a:rPr lang="en-US" sz="2500" dirty="0"/>
+            </a:br>
+            <a:r>
+              <a:rPr lang="en-US" b="0" dirty="0"/>
+              <a:t>Find  neff_TE0 for </a:t>
+            </a:r>
+            <a:r>
+              <a:rPr lang="en-US" b="0" dirty="0" err="1"/>
+              <a:t>wvl</a:t>
+            </a:r>
+            <a:r>
+              <a:rPr lang="en-US" b="0" dirty="0"/>
+              <a:t> 1.55 µm, width 1.0 µm for R=25,50,75,100, 125,150 µm</a:t>
+            </a:r>
+            <a:br>
+              <a:rPr lang="en-US" sz="2500" dirty="0"/>
+            </a:br>
+            <a:endParaRPr lang="en-US" sz="2500" b="0" dirty="0">
+              <a:latin typeface="+mj-lt"/>
+              <a:cs typeface="Lucida Sans"/>
+            </a:endParaRPr>
+          </a:p>
+        </p:txBody>
+      </p:sp>
+      <p:pic>
+        <p:nvPicPr>
+          <p:cNvPr id="83" name="Gráfico 82">
+            <a:extLst>
+              <a:ext uri="{FF2B5EF4-FFF2-40B4-BE49-F238E27FC236}">
+                <a16:creationId xmlns:a16="http://schemas.microsoft.com/office/drawing/2014/main" id="{7205C76C-88BE-EE3D-195B-12EA1CBED3D5}"/>
+              </a:ext>
+            </a:extLst>
+          </p:cNvPr>
+          <p:cNvPicPr>
+            <a:picLocks noChangeAspect="1"/>
+          </p:cNvPicPr>
+          <p:nvPr/>
+        </p:nvPicPr>
+        <p:blipFill>
+          <a:blip r:embed="rId3">
+            <a:extLst>
+              <a:ext uri="{96DAC541-7B7A-43D3-8B79-37D633B846F1}">
+                <asvg:svgBlip xmlns:asvg="http://schemas.microsoft.com/office/drawing/2016/SVG/main" r:embed="rId4"/>
+              </a:ext>
+            </a:extLst>
+          </a:blip>
+          <a:stretch>
+            <a:fillRect/>
+          </a:stretch>
+        </p:blipFill>
+        <p:spPr>
+          <a:xfrm>
+            <a:off x="5045006" y="6356057"/>
+            <a:ext cx="6409575" cy="363174"/>
+          </a:xfrm>
+          <a:prstGeom prst="rect">
+            <a:avLst/>
+          </a:prstGeom>
+        </p:spPr>
+      </p:pic>
+      <p:sp>
+        <p:nvSpPr>
+          <p:cNvPr id="84" name="Marcador de número de diapositiva 83">
+            <a:extLst>
+              <a:ext uri="{FF2B5EF4-FFF2-40B4-BE49-F238E27FC236}">
+                <a16:creationId xmlns:a16="http://schemas.microsoft.com/office/drawing/2014/main" id="{795DBDDE-C345-D554-D67A-9048961F6A79}"/>
+              </a:ext>
+            </a:extLst>
+          </p:cNvPr>
+          <p:cNvSpPr>
+            <a:spLocks noGrp="1"/>
+          </p:cNvSpPr>
+          <p:nvPr>
+            <p:ph type="sldNum" sz="quarter" idx="7"/>
+          </p:nvPr>
+        </p:nvSpPr>
+        <p:spPr/>
+        <p:txBody>
+          <a:bodyPr/>
+          <a:lstStyle/>
+          <a:p>
+            <a:fld id="{B6F15528-21DE-4FAA-801E-634DDDAF4B2B}" type="slidenum">
+              <a:rPr lang="es-ES" smtClean="0"/>
+              <a:t>18</a:t>
+            </a:fld>
+            <a:endParaRPr lang="es-ES"/>
+          </a:p>
+        </p:txBody>
+      </p:sp>
+      <p:sp>
+        <p:nvSpPr>
+          <p:cNvPr id="3" name="Marcador de pie de página 2">
+            <a:extLst>
+              <a:ext uri="{FF2B5EF4-FFF2-40B4-BE49-F238E27FC236}">
+                <a16:creationId xmlns:a16="http://schemas.microsoft.com/office/drawing/2014/main" id="{F9FEADF6-E2E5-0608-C9C5-8D5C152A9E6E}"/>
+              </a:ext>
+            </a:extLst>
+          </p:cNvPr>
+          <p:cNvSpPr>
+            <a:spLocks noGrp="1"/>
+          </p:cNvSpPr>
+          <p:nvPr>
+            <p:ph type="ftr" sz="quarter" idx="5"/>
+          </p:nvPr>
+        </p:nvSpPr>
+        <p:spPr/>
+        <p:txBody>
+          <a:bodyPr/>
+          <a:lstStyle/>
+          <a:p>
+            <a:pPr marL="12700">
+              <a:spcBef>
+                <a:spcPts val="15"/>
+              </a:spcBef>
+            </a:pPr>
+            <a:r>
+              <a:rPr lang="es-ES" spc="-5"/>
+              <a:t>LAB 1.0. WAVEGUIDES</a:t>
+            </a:r>
+            <a:endParaRPr lang="es-ES" spc="-5" dirty="0"/>
+          </a:p>
+        </p:txBody>
+      </p:sp>
+      <p:pic>
+        <p:nvPicPr>
+          <p:cNvPr id="5" name="Imagen 4">
+            <a:extLst>
+              <a:ext uri="{FF2B5EF4-FFF2-40B4-BE49-F238E27FC236}">
+                <a16:creationId xmlns:a16="http://schemas.microsoft.com/office/drawing/2014/main" id="{78C54D18-4AC4-0FA5-57CE-4DB3FA055B16}"/>
+              </a:ext>
+            </a:extLst>
+          </p:cNvPr>
+          <p:cNvPicPr>
+            <a:picLocks noChangeAspect="1"/>
+          </p:cNvPicPr>
+          <p:nvPr/>
+        </p:nvPicPr>
+        <p:blipFill>
+          <a:blip r:embed="rId5">
+            <a:extLst>
+              <a:ext uri="{28A0092B-C50C-407E-A947-70E740481C1C}">
+                <a14:useLocalDpi xmlns:a14="http://schemas.microsoft.com/office/drawing/2010/main" val="0"/>
+              </a:ext>
+            </a:extLst>
+          </a:blip>
+          <a:srcRect/>
+          <a:stretch/>
+        </p:blipFill>
+        <p:spPr>
+          <a:xfrm>
+            <a:off x="755892" y="2568515"/>
+            <a:ext cx="4847338" cy="3809425"/>
+          </a:xfrm>
+          <a:prstGeom prst="rect">
+            <a:avLst/>
+          </a:prstGeom>
+        </p:spPr>
+      </p:pic>
+      <p:pic>
+        <p:nvPicPr>
+          <p:cNvPr id="4" name="Imagen 3" descr="Gráfico, Diagrama, Gráfico de líneas&#10;&#10;El contenido generado por IA puede ser incorrecto.">
+            <a:extLst>
+              <a:ext uri="{FF2B5EF4-FFF2-40B4-BE49-F238E27FC236}">
+                <a16:creationId xmlns:a16="http://schemas.microsoft.com/office/drawing/2014/main" id="{A101538B-B92D-6F7D-6D06-FE195DABCDA5}"/>
+              </a:ext>
+            </a:extLst>
+          </p:cNvPr>
+          <p:cNvPicPr>
+            <a:picLocks noChangeAspect="1"/>
+          </p:cNvPicPr>
+          <p:nvPr/>
+        </p:nvPicPr>
+        <p:blipFill>
+          <a:blip r:embed="rId6"/>
+          <a:stretch>
+            <a:fillRect/>
+          </a:stretch>
+        </p:blipFill>
+        <p:spPr>
+          <a:xfrm>
+            <a:off x="6248400" y="2464956"/>
+            <a:ext cx="4847338" cy="3880160"/>
+          </a:xfrm>
+          <a:prstGeom prst="rect">
+            <a:avLst/>
+          </a:prstGeom>
+        </p:spPr>
+      </p:pic>
+      <p:pic>
+        <p:nvPicPr>
+          <p:cNvPr id="6" name="Imagen 5" descr="Texto&#10;&#10;El contenido generado por IA puede ser incorrecto.">
+            <a:extLst>
+              <a:ext uri="{FF2B5EF4-FFF2-40B4-BE49-F238E27FC236}">
+                <a16:creationId xmlns:a16="http://schemas.microsoft.com/office/drawing/2014/main" id="{FF17D9B7-D0E3-5FC2-BDA3-AF40C62C9C46}"/>
+              </a:ext>
+            </a:extLst>
+          </p:cNvPr>
+          <p:cNvPicPr>
+            <a:picLocks noChangeAspect="1"/>
+          </p:cNvPicPr>
+          <p:nvPr/>
+        </p:nvPicPr>
+        <p:blipFill>
+          <a:blip r:embed="rId7"/>
+          <a:stretch>
+            <a:fillRect/>
+          </a:stretch>
+        </p:blipFill>
+        <p:spPr>
+          <a:xfrm>
+            <a:off x="651419" y="1193846"/>
+            <a:ext cx="5633926" cy="1231551"/>
+          </a:xfrm>
+          <a:prstGeom prst="rect">
+            <a:avLst/>
+          </a:prstGeom>
+        </p:spPr>
+      </p:pic>
+      <p:sp>
+        <p:nvSpPr>
+          <p:cNvPr id="8" name="CuadroTexto 7">
+            <a:extLst>
+              <a:ext uri="{FF2B5EF4-FFF2-40B4-BE49-F238E27FC236}">
+                <a16:creationId xmlns:a16="http://schemas.microsoft.com/office/drawing/2014/main" id="{EE876D79-D3B0-58DA-5E27-08C139CC9648}"/>
+              </a:ext>
+            </a:extLst>
+          </p:cNvPr>
+          <p:cNvSpPr txBox="1"/>
+          <p:nvPr/>
+        </p:nvSpPr>
+        <p:spPr>
+          <a:xfrm>
+            <a:off x="6477000" y="1538484"/>
+            <a:ext cx="6128326" cy="369332"/>
+          </a:xfrm>
+          <a:prstGeom prst="rect">
+            <a:avLst/>
+          </a:prstGeom>
+          <a:noFill/>
+        </p:spPr>
+        <p:txBody>
+          <a:bodyPr wrap="square">
+            <a:spAutoFit/>
+          </a:bodyPr>
+          <a:lstStyle/>
+          <a:p>
+            <a:r>
+              <a:rPr lang="en-US" b="0" dirty="0" err="1"/>
+              <a:t>Corresponde</a:t>
+            </a:r>
+            <a:r>
+              <a:rPr lang="en-US" b="0" dirty="0"/>
+              <a:t> </a:t>
+            </a:r>
+            <a:r>
+              <a:rPr lang="en-US" b="0" dirty="0" err="1"/>
+              <a:t>en</a:t>
+            </a:r>
+            <a:r>
+              <a:rPr lang="en-US" b="0" dirty="0"/>
+              <a:t> </a:t>
+            </a:r>
+            <a:r>
+              <a:rPr lang="en-US" b="0" dirty="0" err="1"/>
+              <a:t>este</a:t>
+            </a:r>
+            <a:r>
+              <a:rPr lang="en-US" b="0" dirty="0"/>
+              <a:t> </a:t>
+            </a:r>
+            <a:r>
+              <a:rPr lang="en-US" b="0" dirty="0" err="1"/>
+              <a:t>caso</a:t>
+            </a:r>
+            <a:r>
+              <a:rPr lang="en-US" b="0" dirty="0"/>
+              <a:t> con </a:t>
+            </a:r>
+            <a:r>
+              <a:rPr lang="en-US" b="0" dirty="0" err="1"/>
+              <a:t>el</a:t>
+            </a:r>
+            <a:r>
+              <a:rPr lang="en-US" b="0" dirty="0"/>
+              <a:t> modo 3.</a:t>
+            </a:r>
+            <a:endParaRPr lang="es-ES" dirty="0"/>
+          </a:p>
+        </p:txBody>
+      </p:sp>
+    </p:spTree>
+    <p:extLst>
+      <p:ext uri="{BB962C8B-B14F-4D97-AF65-F5344CB8AC3E}">
+        <p14:creationId xmlns:p14="http://schemas.microsoft.com/office/powerpoint/2010/main" val="643018143"/>
+      </p:ext>
+    </p:extLst>
+  </p:cSld>
+  <p:clrMapOvr>
+    <a:masterClrMapping/>
+  </p:clrMapOvr>
+</p:sld>
+</file>
+
+<file path=ppt/slides/slide19.xml><?xml version="1.0" encoding="utf-8"?>
+<p:sld xmlns:a="http://schemas.openxmlformats.org/drawingml/2006/main" xmlns:r="http://schemas.openxmlformats.org/officeDocument/2006/relationships" xmlns:p="http://schemas.openxmlformats.org/presentationml/2006/main">
+  <p:cSld>
+    <p:spTree>
+      <p:nvGrpSpPr>
+        <p:cNvPr id="1" name="">
+          <a:extLst>
+            <a:ext uri="{FF2B5EF4-FFF2-40B4-BE49-F238E27FC236}">
+              <a16:creationId xmlns:a16="http://schemas.microsoft.com/office/drawing/2014/main" id="{869F3506-6AAB-A14F-5B0C-B74354FB7590}"/>
+            </a:ext>
+          </a:extLst>
+        </p:cNvPr>
+        <p:cNvGrpSpPr/>
+        <p:nvPr/>
+      </p:nvGrpSpPr>
+      <p:grpSpPr>
+        <a:xfrm>
+          <a:off x="0" y="0"/>
+          <a:ext cx="0" cy="0"/>
+          <a:chOff x="0" y="0"/>
+          <a:chExt cx="0" cy="0"/>
+        </a:xfrm>
+      </p:grpSpPr>
+      <p:sp>
+        <p:nvSpPr>
+          <p:cNvPr id="16" name="object 16">
+            <a:extLst>
+              <a:ext uri="{FF2B5EF4-FFF2-40B4-BE49-F238E27FC236}">
+                <a16:creationId xmlns:a16="http://schemas.microsoft.com/office/drawing/2014/main" id="{43B02D9A-B9AD-8C59-7850-21411CD18197}"/>
+              </a:ext>
+            </a:extLst>
+          </p:cNvPr>
+          <p:cNvSpPr txBox="1">
+            <a:spLocks noGrp="1"/>
+          </p:cNvSpPr>
+          <p:nvPr>
+            <p:ph type="title"/>
+          </p:nvPr>
+        </p:nvSpPr>
+        <p:spPr>
+          <a:xfrm>
+            <a:off x="685800" y="408883"/>
+            <a:ext cx="10994410" cy="1090042"/>
+          </a:xfrm>
+          <a:prstGeom prst="rect">
+            <a:avLst/>
+          </a:prstGeom>
+        </p:spPr>
+        <p:txBody>
+          <a:bodyPr vert="horz" wrap="square" lIns="0" tIns="12700" rIns="0" bIns="0" rtlCol="0">
+            <a:spAutoFit/>
+          </a:bodyPr>
+          <a:lstStyle/>
+          <a:p>
+            <a:pPr marL="12700">
+              <a:lnSpc>
+                <a:spcPct val="100000"/>
+              </a:lnSpc>
+              <a:spcBef>
+                <a:spcPts val="100"/>
+              </a:spcBef>
+            </a:pPr>
+            <a:r>
+              <a:rPr lang="en-US" sz="2500" dirty="0"/>
+              <a:t>Learning outcome #4 – Bend waveguide radius vs. loss – deep TM0</a:t>
+            </a:r>
+            <a:br>
+              <a:rPr lang="en-US" sz="2500" dirty="0"/>
+            </a:br>
+            <a:r>
+              <a:rPr lang="en-US" b="0" dirty="0"/>
+              <a:t>Find  neff_TE0 for </a:t>
+            </a:r>
+            <a:r>
+              <a:rPr lang="en-US" b="0" dirty="0" err="1"/>
+              <a:t>wvl</a:t>
+            </a:r>
+            <a:r>
+              <a:rPr lang="en-US" b="0" dirty="0"/>
+              <a:t> 1.55 µm, width 1.0 µm for R=25,50,75,100, 125,150 µm</a:t>
+            </a:r>
+            <a:br>
+              <a:rPr lang="en-US" sz="2500" dirty="0"/>
+            </a:br>
+            <a:endParaRPr lang="en-US" sz="2500" b="0" dirty="0">
+              <a:latin typeface="+mj-lt"/>
+              <a:cs typeface="Lucida Sans"/>
+            </a:endParaRPr>
+          </a:p>
+        </p:txBody>
+      </p:sp>
+      <p:pic>
+        <p:nvPicPr>
+          <p:cNvPr id="83" name="Gráfico 82">
+            <a:extLst>
+              <a:ext uri="{FF2B5EF4-FFF2-40B4-BE49-F238E27FC236}">
+                <a16:creationId xmlns:a16="http://schemas.microsoft.com/office/drawing/2014/main" id="{6E9B8864-539D-97A4-C4E2-7C6873F66789}"/>
+              </a:ext>
+            </a:extLst>
+          </p:cNvPr>
+          <p:cNvPicPr>
+            <a:picLocks noChangeAspect="1"/>
+          </p:cNvPicPr>
+          <p:nvPr/>
+        </p:nvPicPr>
+        <p:blipFill>
+          <a:blip r:embed="rId3">
+            <a:extLst>
+              <a:ext uri="{96DAC541-7B7A-43D3-8B79-37D633B846F1}">
+                <asvg:svgBlip xmlns:asvg="http://schemas.microsoft.com/office/drawing/2016/SVG/main" r:embed="rId4"/>
+              </a:ext>
+            </a:extLst>
+          </a:blip>
+          <a:stretch>
+            <a:fillRect/>
+          </a:stretch>
+        </p:blipFill>
+        <p:spPr>
+          <a:xfrm>
+            <a:off x="5045006" y="6356057"/>
+            <a:ext cx="6409575" cy="363174"/>
+          </a:xfrm>
+          <a:prstGeom prst="rect">
+            <a:avLst/>
+          </a:prstGeom>
+        </p:spPr>
+      </p:pic>
+      <p:sp>
+        <p:nvSpPr>
+          <p:cNvPr id="84" name="Marcador de número de diapositiva 83">
+            <a:extLst>
+              <a:ext uri="{FF2B5EF4-FFF2-40B4-BE49-F238E27FC236}">
+                <a16:creationId xmlns:a16="http://schemas.microsoft.com/office/drawing/2014/main" id="{1D4C4061-65D4-91CE-658C-458E9ED5F3F8}"/>
+              </a:ext>
+            </a:extLst>
+          </p:cNvPr>
+          <p:cNvSpPr>
+            <a:spLocks noGrp="1"/>
+          </p:cNvSpPr>
+          <p:nvPr>
+            <p:ph type="sldNum" sz="quarter" idx="7"/>
+          </p:nvPr>
+        </p:nvSpPr>
+        <p:spPr/>
+        <p:txBody>
+          <a:bodyPr/>
+          <a:lstStyle/>
+          <a:p>
+            <a:fld id="{B6F15528-21DE-4FAA-801E-634DDDAF4B2B}" type="slidenum">
+              <a:rPr lang="es-ES" smtClean="0"/>
+              <a:t>19</a:t>
+            </a:fld>
+            <a:endParaRPr lang="es-ES"/>
+          </a:p>
+        </p:txBody>
+      </p:sp>
+      <p:sp>
+        <p:nvSpPr>
+          <p:cNvPr id="3" name="Marcador de pie de página 2">
+            <a:extLst>
+              <a:ext uri="{FF2B5EF4-FFF2-40B4-BE49-F238E27FC236}">
+                <a16:creationId xmlns:a16="http://schemas.microsoft.com/office/drawing/2014/main" id="{84770F89-FD98-3271-18E6-43E028CDE501}"/>
+              </a:ext>
+            </a:extLst>
+          </p:cNvPr>
+          <p:cNvSpPr>
+            <a:spLocks noGrp="1"/>
+          </p:cNvSpPr>
+          <p:nvPr>
+            <p:ph type="ftr" sz="quarter" idx="5"/>
+          </p:nvPr>
+        </p:nvSpPr>
+        <p:spPr/>
+        <p:txBody>
+          <a:bodyPr/>
+          <a:lstStyle/>
+          <a:p>
+            <a:pPr marL="12700">
+              <a:spcBef>
+                <a:spcPts val="15"/>
+              </a:spcBef>
+            </a:pPr>
+            <a:r>
+              <a:rPr lang="es-ES" spc="-5"/>
+              <a:t>LAB 1.0. WAVEGUIDES</a:t>
+            </a:r>
+            <a:endParaRPr lang="es-ES" spc="-5" dirty="0"/>
+          </a:p>
+        </p:txBody>
+      </p:sp>
+      <p:sp>
+        <p:nvSpPr>
+          <p:cNvPr id="2" name="CuadroTexto 1">
+            <a:extLst>
+              <a:ext uri="{FF2B5EF4-FFF2-40B4-BE49-F238E27FC236}">
+                <a16:creationId xmlns:a16="http://schemas.microsoft.com/office/drawing/2014/main" id="{0819B592-63DD-65D9-F4D3-5DEC11A49960}"/>
+              </a:ext>
+            </a:extLst>
+          </p:cNvPr>
+          <p:cNvSpPr txBox="1"/>
+          <p:nvPr/>
+        </p:nvSpPr>
+        <p:spPr>
+          <a:xfrm>
+            <a:off x="616527" y="1295400"/>
+            <a:ext cx="11199971" cy="461665"/>
+          </a:xfrm>
+          <a:prstGeom prst="rect">
+            <a:avLst/>
+          </a:prstGeom>
+          <a:solidFill>
+            <a:schemeClr val="bg1">
+              <a:lumMod val="95000"/>
+            </a:schemeClr>
+          </a:solidFill>
+          <a:ln w="28575">
+            <a:solidFill>
+              <a:srgbClr val="E0700D"/>
+            </a:solidFill>
+          </a:ln>
+        </p:spPr>
+        <p:txBody>
+          <a:bodyPr wrap="square" rtlCol="0">
+            <a:spAutoFit/>
+          </a:bodyPr>
+          <a:lstStyle/>
+          <a:p>
+            <a:pPr algn="just"/>
+            <a:r>
+              <a:rPr lang="en-US" sz="1200" dirty="0">
+                <a:latin typeface="Arial" panose="020B0604020202020204" pitchFamily="34" charset="0"/>
+                <a:cs typeface="Arial" panose="020B0604020202020204" pitchFamily="34" charset="0"/>
+              </a:rPr>
+              <a:t>El modo TM0 </a:t>
+            </a:r>
+            <a:r>
+              <a:rPr lang="en-US" sz="1200" dirty="0" err="1">
+                <a:latin typeface="Arial" panose="020B0604020202020204" pitchFamily="34" charset="0"/>
+                <a:cs typeface="Arial" panose="020B0604020202020204" pitchFamily="34" charset="0"/>
+              </a:rPr>
+              <a:t>ya</a:t>
+            </a:r>
+            <a:r>
+              <a:rPr lang="en-US" sz="1200" dirty="0">
+                <a:latin typeface="Arial" panose="020B0604020202020204" pitchFamily="34" charset="0"/>
+                <a:cs typeface="Arial" panose="020B0604020202020204" pitchFamily="34" charset="0"/>
+              </a:rPr>
+              <a:t> </a:t>
+            </a:r>
+            <a:r>
+              <a:rPr lang="en-US" sz="1200" dirty="0" err="1">
+                <a:latin typeface="Arial" panose="020B0604020202020204" pitchFamily="34" charset="0"/>
+                <a:cs typeface="Arial" panose="020B0604020202020204" pitchFamily="34" charset="0"/>
+              </a:rPr>
+              <a:t>viaja</a:t>
+            </a:r>
+            <a:r>
+              <a:rPr lang="en-US" sz="1200" dirty="0">
+                <a:latin typeface="Arial" panose="020B0604020202020204" pitchFamily="34" charset="0"/>
+                <a:cs typeface="Arial" panose="020B0604020202020204" pitchFamily="34" charset="0"/>
+              </a:rPr>
+              <a:t> </a:t>
+            </a:r>
+            <a:r>
+              <a:rPr lang="en-US" sz="1200" dirty="0" err="1">
+                <a:latin typeface="Arial" panose="020B0604020202020204" pitchFamily="34" charset="0"/>
+                <a:cs typeface="Arial" panose="020B0604020202020204" pitchFamily="34" charset="0"/>
+              </a:rPr>
+              <a:t>mucho</a:t>
+            </a:r>
+            <a:r>
+              <a:rPr lang="en-US" sz="1200" dirty="0">
+                <a:latin typeface="Arial" panose="020B0604020202020204" pitchFamily="34" charset="0"/>
+                <a:cs typeface="Arial" panose="020B0604020202020204" pitchFamily="34" charset="0"/>
+              </a:rPr>
+              <a:t> </a:t>
+            </a:r>
+            <a:r>
+              <a:rPr lang="en-US" sz="1200" dirty="0" err="1">
+                <a:latin typeface="Arial" panose="020B0604020202020204" pitchFamily="34" charset="0"/>
+                <a:cs typeface="Arial" panose="020B0604020202020204" pitchFamily="34" charset="0"/>
+              </a:rPr>
+              <a:t>por</a:t>
+            </a:r>
+            <a:r>
+              <a:rPr lang="en-US" sz="1200" dirty="0">
+                <a:latin typeface="Arial" panose="020B0604020202020204" pitchFamily="34" charset="0"/>
+                <a:cs typeface="Arial" panose="020B0604020202020204" pitchFamily="34" charset="0"/>
+              </a:rPr>
+              <a:t> la </a:t>
+            </a:r>
+            <a:r>
+              <a:rPr lang="en-US" sz="1200" dirty="0" err="1">
+                <a:latin typeface="Arial" panose="020B0604020202020204" pitchFamily="34" charset="0"/>
+                <a:cs typeface="Arial" panose="020B0604020202020204" pitchFamily="34" charset="0"/>
+              </a:rPr>
+              <a:t>cubierta</a:t>
+            </a:r>
+            <a:r>
+              <a:rPr lang="en-US" sz="1200" dirty="0">
+                <a:latin typeface="Arial" panose="020B0604020202020204" pitchFamily="34" charset="0"/>
+                <a:cs typeface="Arial" panose="020B0604020202020204" pitchFamily="34" charset="0"/>
+              </a:rPr>
+              <a:t> y </a:t>
+            </a:r>
+            <a:r>
+              <a:rPr lang="en-US" sz="1200" dirty="0" err="1">
+                <a:latin typeface="Arial" panose="020B0604020202020204" pitchFamily="34" charset="0"/>
+                <a:cs typeface="Arial" panose="020B0604020202020204" pitchFamily="34" charset="0"/>
+              </a:rPr>
+              <a:t>tiene</a:t>
+            </a:r>
+            <a:r>
+              <a:rPr lang="en-US" sz="1200" dirty="0">
+                <a:latin typeface="Arial" panose="020B0604020202020204" pitchFamily="34" charset="0"/>
+                <a:cs typeface="Arial" panose="020B0604020202020204" pitchFamily="34" charset="0"/>
+              </a:rPr>
+              <a:t> </a:t>
+            </a:r>
+            <a:r>
+              <a:rPr lang="en-US" sz="1200" dirty="0" err="1">
+                <a:latin typeface="Arial" panose="020B0604020202020204" pitchFamily="34" charset="0"/>
+                <a:cs typeface="Arial" panose="020B0604020202020204" pitchFamily="34" charset="0"/>
+              </a:rPr>
+              <a:t>menos</a:t>
+            </a:r>
+            <a:r>
+              <a:rPr lang="en-US" sz="1200" dirty="0">
+                <a:latin typeface="Arial" panose="020B0604020202020204" pitchFamily="34" charset="0"/>
+                <a:cs typeface="Arial" panose="020B0604020202020204" pitchFamily="34" charset="0"/>
+              </a:rPr>
+              <a:t> </a:t>
+            </a:r>
+            <a:r>
+              <a:rPr lang="en-US" sz="1200" dirty="0" err="1">
+                <a:latin typeface="Arial" panose="020B0604020202020204" pitchFamily="34" charset="0"/>
+                <a:cs typeface="Arial" panose="020B0604020202020204" pitchFamily="34" charset="0"/>
+              </a:rPr>
+              <a:t>intensidad</a:t>
+            </a:r>
+            <a:r>
+              <a:rPr lang="en-US" sz="1200" dirty="0">
+                <a:latin typeface="Arial" panose="020B0604020202020204" pitchFamily="34" charset="0"/>
+                <a:cs typeface="Arial" panose="020B0604020202020204" pitchFamily="34" charset="0"/>
+              </a:rPr>
+              <a:t>, </a:t>
+            </a:r>
+            <a:r>
+              <a:rPr lang="en-US" sz="1200" dirty="0" err="1">
+                <a:latin typeface="Arial" panose="020B0604020202020204" pitchFamily="34" charset="0"/>
+                <a:cs typeface="Arial" panose="020B0604020202020204" pitchFamily="34" charset="0"/>
+              </a:rPr>
+              <a:t>incluso</a:t>
+            </a:r>
+            <a:r>
+              <a:rPr lang="en-US" sz="1200" dirty="0">
+                <a:latin typeface="Arial" panose="020B0604020202020204" pitchFamily="34" charset="0"/>
+                <a:cs typeface="Arial" panose="020B0604020202020204" pitchFamily="34" charset="0"/>
+              </a:rPr>
+              <a:t> para un radio de 20um, </a:t>
+            </a:r>
+            <a:r>
+              <a:rPr lang="en-US" sz="1200" dirty="0" err="1">
+                <a:latin typeface="Arial" panose="020B0604020202020204" pitchFamily="34" charset="0"/>
+                <a:cs typeface="Arial" panose="020B0604020202020204" pitchFamily="34" charset="0"/>
+              </a:rPr>
+              <a:t>apenas</a:t>
+            </a:r>
+            <a:r>
+              <a:rPr lang="en-US" sz="1200" dirty="0">
+                <a:latin typeface="Arial" panose="020B0604020202020204" pitchFamily="34" charset="0"/>
+                <a:cs typeface="Arial" panose="020B0604020202020204" pitchFamily="34" charset="0"/>
+              </a:rPr>
+              <a:t> </a:t>
+            </a:r>
+            <a:r>
+              <a:rPr lang="en-US" sz="1200" dirty="0" err="1">
+                <a:latin typeface="Arial" panose="020B0604020202020204" pitchFamily="34" charset="0"/>
+                <a:cs typeface="Arial" panose="020B0604020202020204" pitchFamily="34" charset="0"/>
+              </a:rPr>
+              <a:t>vemos</a:t>
+            </a:r>
+            <a:r>
+              <a:rPr lang="en-US" sz="1200" dirty="0">
+                <a:latin typeface="Arial" panose="020B0604020202020204" pitchFamily="34" charset="0"/>
+                <a:cs typeface="Arial" panose="020B0604020202020204" pitchFamily="34" charset="0"/>
+              </a:rPr>
+              <a:t> campo </a:t>
+            </a:r>
+            <a:r>
+              <a:rPr lang="en-US" sz="1200" dirty="0" err="1">
+                <a:latin typeface="Arial" panose="020B0604020202020204" pitchFamily="34" charset="0"/>
+                <a:cs typeface="Arial" panose="020B0604020202020204" pitchFamily="34" charset="0"/>
+              </a:rPr>
+              <a:t>campo</a:t>
+            </a:r>
+            <a:r>
+              <a:rPr lang="en-US" sz="1200" dirty="0">
+                <a:latin typeface="Arial" panose="020B0604020202020204" pitchFamily="34" charset="0"/>
+                <a:cs typeface="Arial" panose="020B0604020202020204" pitchFamily="34" charset="0"/>
+              </a:rPr>
+              <a:t>. </a:t>
+            </a:r>
+            <a:r>
+              <a:rPr lang="en-US" sz="1200" dirty="0" err="1">
+                <a:latin typeface="Arial" panose="020B0604020202020204" pitchFamily="34" charset="0"/>
+                <a:cs typeface="Arial" panose="020B0604020202020204" pitchFamily="34" charset="0"/>
+              </a:rPr>
+              <a:t>Tebemos</a:t>
+            </a:r>
+            <a:r>
+              <a:rPr lang="en-US" sz="1200" dirty="0">
+                <a:latin typeface="Arial" panose="020B0604020202020204" pitchFamily="34" charset="0"/>
+                <a:cs typeface="Arial" panose="020B0604020202020204" pitchFamily="34" charset="0"/>
+              </a:rPr>
+              <a:t> </a:t>
+            </a:r>
+            <a:r>
+              <a:rPr lang="en-US" sz="1200" dirty="0" err="1">
+                <a:latin typeface="Arial" panose="020B0604020202020204" pitchFamily="34" charset="0"/>
+                <a:cs typeface="Arial" panose="020B0604020202020204" pitchFamily="34" charset="0"/>
+              </a:rPr>
+              <a:t>tantas</a:t>
+            </a:r>
+            <a:r>
+              <a:rPr lang="en-US" sz="1200" dirty="0">
+                <a:latin typeface="Arial" panose="020B0604020202020204" pitchFamily="34" charset="0"/>
+                <a:cs typeface="Arial" panose="020B0604020202020204" pitchFamily="34" charset="0"/>
+              </a:rPr>
+              <a:t> </a:t>
+            </a:r>
+            <a:r>
+              <a:rPr lang="en-US" sz="1200" dirty="0" err="1">
+                <a:latin typeface="Arial" panose="020B0604020202020204" pitchFamily="34" charset="0"/>
+                <a:cs typeface="Arial" panose="020B0604020202020204" pitchFamily="34" charset="0"/>
+              </a:rPr>
+              <a:t>pérdidas</a:t>
+            </a:r>
+            <a:r>
+              <a:rPr lang="en-US" sz="1200" dirty="0">
+                <a:latin typeface="Arial" panose="020B0604020202020204" pitchFamily="34" charset="0"/>
+                <a:cs typeface="Arial" panose="020B0604020202020204" pitchFamily="34" charset="0"/>
+              </a:rPr>
+              <a:t> de modo </a:t>
+            </a:r>
+            <a:r>
+              <a:rPr lang="en-US" sz="1200" dirty="0" err="1">
+                <a:latin typeface="Arial" panose="020B0604020202020204" pitchFamily="34" charset="0"/>
+                <a:cs typeface="Arial" panose="020B0604020202020204" pitchFamily="34" charset="0"/>
+              </a:rPr>
+              <a:t>que</a:t>
+            </a:r>
+            <a:r>
+              <a:rPr lang="en-US" sz="1200" dirty="0">
+                <a:latin typeface="Arial" panose="020B0604020202020204" pitchFamily="34" charset="0"/>
+                <a:cs typeface="Arial" panose="020B0604020202020204" pitchFamily="34" charset="0"/>
+              </a:rPr>
+              <a:t> las de </a:t>
+            </a:r>
+            <a:r>
+              <a:rPr lang="en-US" sz="1200" dirty="0" err="1">
+                <a:latin typeface="Arial" panose="020B0604020202020204" pitchFamily="34" charset="0"/>
+                <a:cs typeface="Arial" panose="020B0604020202020204" pitchFamily="34" charset="0"/>
+              </a:rPr>
+              <a:t>propagación</a:t>
+            </a:r>
+            <a:r>
+              <a:rPr lang="en-US" sz="1200" dirty="0">
+                <a:latin typeface="Arial" panose="020B0604020202020204" pitchFamily="34" charset="0"/>
+                <a:cs typeface="Arial" panose="020B0604020202020204" pitchFamily="34" charset="0"/>
+              </a:rPr>
+              <a:t> son </a:t>
+            </a:r>
+            <a:r>
+              <a:rPr lang="en-US" sz="1200" dirty="0" err="1">
+                <a:latin typeface="Arial" panose="020B0604020202020204" pitchFamily="34" charset="0"/>
+                <a:cs typeface="Arial" panose="020B0604020202020204" pitchFamily="34" charset="0"/>
+              </a:rPr>
+              <a:t>insignificantes</a:t>
+            </a:r>
+            <a:r>
+              <a:rPr lang="en-US" sz="1200" dirty="0">
+                <a:latin typeface="Arial" panose="020B0604020202020204" pitchFamily="34" charset="0"/>
+                <a:cs typeface="Arial" panose="020B0604020202020204" pitchFamily="34" charset="0"/>
+              </a:rPr>
+              <a:t> </a:t>
+            </a:r>
+            <a:r>
+              <a:rPr lang="en-US" sz="1200" dirty="0" err="1">
+                <a:latin typeface="Arial" panose="020B0604020202020204" pitchFamily="34" charset="0"/>
+                <a:cs typeface="Arial" panose="020B0604020202020204" pitchFamily="34" charset="0"/>
+              </a:rPr>
+              <a:t>en</a:t>
+            </a:r>
+            <a:r>
+              <a:rPr lang="en-US" sz="1200" dirty="0">
+                <a:latin typeface="Arial" panose="020B0604020202020204" pitchFamily="34" charset="0"/>
+                <a:cs typeface="Arial" panose="020B0604020202020204" pitchFamily="34" charset="0"/>
+              </a:rPr>
+              <a:t> </a:t>
+            </a:r>
+            <a:r>
+              <a:rPr lang="en-US" sz="1200" dirty="0" err="1">
+                <a:latin typeface="Arial" panose="020B0604020202020204" pitchFamily="34" charset="0"/>
+                <a:cs typeface="Arial" panose="020B0604020202020204" pitchFamily="34" charset="0"/>
+              </a:rPr>
+              <a:t>comparación</a:t>
+            </a:r>
+            <a:r>
+              <a:rPr lang="en-US" sz="1200" dirty="0">
+                <a:latin typeface="Arial" panose="020B0604020202020204" pitchFamily="34" charset="0"/>
+                <a:cs typeface="Arial" panose="020B0604020202020204" pitchFamily="34" charset="0"/>
+              </a:rPr>
+              <a:t>.   </a:t>
+            </a:r>
+          </a:p>
+        </p:txBody>
+      </p:sp>
+      <p:pic>
+        <p:nvPicPr>
+          <p:cNvPr id="7" name="Imagen 6" descr="Gráfico, Histograma&#10;&#10;El contenido generado por IA puede ser incorrecto.">
+            <a:extLst>
+              <a:ext uri="{FF2B5EF4-FFF2-40B4-BE49-F238E27FC236}">
+                <a16:creationId xmlns:a16="http://schemas.microsoft.com/office/drawing/2014/main" id="{CADE9EB3-13C5-3352-D066-DDBA4B77D55C}"/>
+              </a:ext>
+            </a:extLst>
+          </p:cNvPr>
+          <p:cNvPicPr>
+            <a:picLocks noChangeAspect="1"/>
+          </p:cNvPicPr>
+          <p:nvPr/>
+        </p:nvPicPr>
+        <p:blipFill>
+          <a:blip r:embed="rId5"/>
+          <a:stretch>
+            <a:fillRect/>
+          </a:stretch>
+        </p:blipFill>
+        <p:spPr>
+          <a:xfrm>
+            <a:off x="914399" y="2133600"/>
+            <a:ext cx="4501989" cy="2967336"/>
+          </a:xfrm>
+          <a:prstGeom prst="rect">
+            <a:avLst/>
+          </a:prstGeom>
+        </p:spPr>
+      </p:pic>
+      <p:sp>
+        <p:nvSpPr>
+          <p:cNvPr id="9" name="CuadroTexto 8">
+            <a:extLst>
+              <a:ext uri="{FF2B5EF4-FFF2-40B4-BE49-F238E27FC236}">
+                <a16:creationId xmlns:a16="http://schemas.microsoft.com/office/drawing/2014/main" id="{48E64348-C561-1036-A9C7-9BC68C0578FE}"/>
+              </a:ext>
+            </a:extLst>
+          </p:cNvPr>
+          <p:cNvSpPr txBox="1"/>
+          <p:nvPr/>
+        </p:nvSpPr>
+        <p:spPr>
+          <a:xfrm>
+            <a:off x="1360058" y="2116027"/>
+            <a:ext cx="6128326" cy="369332"/>
+          </a:xfrm>
+          <a:prstGeom prst="rect">
+            <a:avLst/>
+          </a:prstGeom>
+          <a:noFill/>
+        </p:spPr>
+        <p:txBody>
+          <a:bodyPr wrap="square">
+            <a:spAutoFit/>
+          </a:bodyPr>
+          <a:lstStyle/>
+          <a:p>
+            <a:r>
+              <a:rPr lang="en-US" sz="1800" dirty="0">
+                <a:latin typeface="Arial" panose="020B0604020202020204" pitchFamily="34" charset="0"/>
+                <a:cs typeface="Arial" panose="020B0604020202020204" pitchFamily="34" charset="0"/>
+              </a:rPr>
+              <a:t>Modo TM0 R=20um</a:t>
+            </a:r>
+            <a:endParaRPr lang="es-ES" dirty="0"/>
+          </a:p>
+        </p:txBody>
+      </p:sp>
+    </p:spTree>
+    <p:extLst>
+      <p:ext uri="{BB962C8B-B14F-4D97-AF65-F5344CB8AC3E}">
+        <p14:creationId xmlns:p14="http://schemas.microsoft.com/office/powerpoint/2010/main" val="2935266029"/>
+      </p:ext>
+    </p:extLst>
   </p:cSld>
   <p:clrMapOvr>
     <a:masterClrMapping/>
@@ -13120,6 +14857,708 @@
         <p14:creationId xmlns:p14="http://schemas.microsoft.com/office/powerpoint/2010/main" val="473922805"/>
       </p:ext>
     </p:extLst>
+  </p:cSld>
+  <p:clrMapOvr>
+    <a:masterClrMapping/>
+  </p:clrMapOvr>
+</p:sld>
+</file>
+
+<file path=ppt/slides/slide20.xml><?xml version="1.0" encoding="utf-8"?>
+<p:sld xmlns:a="http://schemas.openxmlformats.org/drawingml/2006/main" xmlns:r="http://schemas.openxmlformats.org/officeDocument/2006/relationships" xmlns:p="http://schemas.openxmlformats.org/presentationml/2006/main">
+  <p:cSld>
+    <p:spTree>
+      <p:nvGrpSpPr>
+        <p:cNvPr id="1" name="">
+          <a:extLst>
+            <a:ext uri="{FF2B5EF4-FFF2-40B4-BE49-F238E27FC236}">
+              <a16:creationId xmlns:a16="http://schemas.microsoft.com/office/drawing/2014/main" id="{D5203B0F-7F51-D93D-B46C-FF6BA28BFCFD}"/>
+            </a:ext>
+          </a:extLst>
+        </p:cNvPr>
+        <p:cNvGrpSpPr/>
+        <p:nvPr/>
+      </p:nvGrpSpPr>
+      <p:grpSpPr>
+        <a:xfrm>
+          <a:off x="0" y="0"/>
+          <a:ext cx="0" cy="0"/>
+          <a:chOff x="0" y="0"/>
+          <a:chExt cx="0" cy="0"/>
+        </a:xfrm>
+      </p:grpSpPr>
+      <p:sp>
+        <p:nvSpPr>
+          <p:cNvPr id="16" name="object 16">
+            <a:extLst>
+              <a:ext uri="{FF2B5EF4-FFF2-40B4-BE49-F238E27FC236}">
+                <a16:creationId xmlns:a16="http://schemas.microsoft.com/office/drawing/2014/main" id="{04E12D16-E2C0-909A-175D-2349C637914D}"/>
+              </a:ext>
+            </a:extLst>
+          </p:cNvPr>
+          <p:cNvSpPr txBox="1">
+            <a:spLocks noGrp="1"/>
+          </p:cNvSpPr>
+          <p:nvPr>
+            <p:ph type="title"/>
+          </p:nvPr>
+        </p:nvSpPr>
+        <p:spPr>
+          <a:xfrm>
+            <a:off x="685800" y="408883"/>
+            <a:ext cx="10994410" cy="1090042"/>
+          </a:xfrm>
+          <a:prstGeom prst="rect">
+            <a:avLst/>
+          </a:prstGeom>
+        </p:spPr>
+        <p:txBody>
+          <a:bodyPr vert="horz" wrap="square" lIns="0" tIns="12700" rIns="0" bIns="0" rtlCol="0">
+            <a:spAutoFit/>
+          </a:bodyPr>
+          <a:lstStyle/>
+          <a:p>
+            <a:pPr marL="12700">
+              <a:lnSpc>
+                <a:spcPct val="100000"/>
+              </a:lnSpc>
+              <a:spcBef>
+                <a:spcPts val="100"/>
+              </a:spcBef>
+            </a:pPr>
+            <a:r>
+              <a:rPr lang="en-US" sz="2500" dirty="0"/>
+              <a:t>Learning outcome #4 – Bend waveguide radius vs. loss – deep TM0</a:t>
+            </a:r>
+            <a:br>
+              <a:rPr lang="en-US" sz="2500" dirty="0"/>
+            </a:br>
+            <a:r>
+              <a:rPr lang="en-US" b="0" dirty="0"/>
+              <a:t>Find  neff_TE0 for </a:t>
+            </a:r>
+            <a:r>
+              <a:rPr lang="en-US" b="0" dirty="0" err="1"/>
+              <a:t>wvl</a:t>
+            </a:r>
+            <a:r>
+              <a:rPr lang="en-US" b="0" dirty="0"/>
+              <a:t> 1.55 µm, width 1.0 µm for R=25,50,75,100, 125,150 µm</a:t>
+            </a:r>
+            <a:br>
+              <a:rPr lang="en-US" sz="2500" dirty="0"/>
+            </a:br>
+            <a:endParaRPr lang="en-US" sz="2500" b="0" dirty="0">
+              <a:latin typeface="+mj-lt"/>
+              <a:cs typeface="Lucida Sans"/>
+            </a:endParaRPr>
+          </a:p>
+        </p:txBody>
+      </p:sp>
+      <p:pic>
+        <p:nvPicPr>
+          <p:cNvPr id="83" name="Gráfico 82">
+            <a:extLst>
+              <a:ext uri="{FF2B5EF4-FFF2-40B4-BE49-F238E27FC236}">
+                <a16:creationId xmlns:a16="http://schemas.microsoft.com/office/drawing/2014/main" id="{38964EE9-3EDF-E114-DC15-0992BF274391}"/>
+              </a:ext>
+            </a:extLst>
+          </p:cNvPr>
+          <p:cNvPicPr>
+            <a:picLocks noChangeAspect="1"/>
+          </p:cNvPicPr>
+          <p:nvPr/>
+        </p:nvPicPr>
+        <p:blipFill>
+          <a:blip r:embed="rId3">
+            <a:extLst>
+              <a:ext uri="{96DAC541-7B7A-43D3-8B79-37D633B846F1}">
+                <asvg:svgBlip xmlns:asvg="http://schemas.microsoft.com/office/drawing/2016/SVG/main" r:embed="rId4"/>
+              </a:ext>
+            </a:extLst>
+          </a:blip>
+          <a:stretch>
+            <a:fillRect/>
+          </a:stretch>
+        </p:blipFill>
+        <p:spPr>
+          <a:xfrm>
+            <a:off x="5045006" y="6356057"/>
+            <a:ext cx="6409575" cy="363174"/>
+          </a:xfrm>
+          <a:prstGeom prst="rect">
+            <a:avLst/>
+          </a:prstGeom>
+        </p:spPr>
+      </p:pic>
+      <p:sp>
+        <p:nvSpPr>
+          <p:cNvPr id="84" name="Marcador de número de diapositiva 83">
+            <a:extLst>
+              <a:ext uri="{FF2B5EF4-FFF2-40B4-BE49-F238E27FC236}">
+                <a16:creationId xmlns:a16="http://schemas.microsoft.com/office/drawing/2014/main" id="{DC855AD6-5910-076F-A48D-906BEFCF4791}"/>
+              </a:ext>
+            </a:extLst>
+          </p:cNvPr>
+          <p:cNvSpPr>
+            <a:spLocks noGrp="1"/>
+          </p:cNvSpPr>
+          <p:nvPr>
+            <p:ph type="sldNum" sz="quarter" idx="7"/>
+          </p:nvPr>
+        </p:nvSpPr>
+        <p:spPr/>
+        <p:txBody>
+          <a:bodyPr/>
+          <a:lstStyle/>
+          <a:p>
+            <a:fld id="{B6F15528-21DE-4FAA-801E-634DDDAF4B2B}" type="slidenum">
+              <a:rPr lang="es-ES" smtClean="0"/>
+              <a:t>20</a:t>
+            </a:fld>
+            <a:endParaRPr lang="es-ES"/>
+          </a:p>
+        </p:txBody>
+      </p:sp>
+      <p:sp>
+        <p:nvSpPr>
+          <p:cNvPr id="3" name="Marcador de pie de página 2">
+            <a:extLst>
+              <a:ext uri="{FF2B5EF4-FFF2-40B4-BE49-F238E27FC236}">
+                <a16:creationId xmlns:a16="http://schemas.microsoft.com/office/drawing/2014/main" id="{09C0F88D-38F0-86A7-ADAE-71FEDB9DF314}"/>
+              </a:ext>
+            </a:extLst>
+          </p:cNvPr>
+          <p:cNvSpPr>
+            <a:spLocks noGrp="1"/>
+          </p:cNvSpPr>
+          <p:nvPr>
+            <p:ph type="ftr" sz="quarter" idx="5"/>
+          </p:nvPr>
+        </p:nvSpPr>
+        <p:spPr/>
+        <p:txBody>
+          <a:bodyPr/>
+          <a:lstStyle/>
+          <a:p>
+            <a:pPr marL="12700">
+              <a:spcBef>
+                <a:spcPts val="15"/>
+              </a:spcBef>
+            </a:pPr>
+            <a:r>
+              <a:rPr lang="es-ES" spc="-5"/>
+              <a:t>LAB 1.0. WAVEGUIDES</a:t>
+            </a:r>
+            <a:endParaRPr lang="es-ES" spc="-5" dirty="0"/>
+          </a:p>
+        </p:txBody>
+      </p:sp>
+      <p:sp>
+        <p:nvSpPr>
+          <p:cNvPr id="2" name="CuadroTexto 1">
+            <a:extLst>
+              <a:ext uri="{FF2B5EF4-FFF2-40B4-BE49-F238E27FC236}">
+                <a16:creationId xmlns:a16="http://schemas.microsoft.com/office/drawing/2014/main" id="{D6D19B95-3645-4E84-D961-65670FC3E5F7}"/>
+              </a:ext>
+            </a:extLst>
+          </p:cNvPr>
+          <p:cNvSpPr txBox="1"/>
+          <p:nvPr/>
+        </p:nvSpPr>
+        <p:spPr>
+          <a:xfrm>
+            <a:off x="609441" y="4860334"/>
+            <a:ext cx="11199971" cy="1200329"/>
+          </a:xfrm>
+          <a:prstGeom prst="rect">
+            <a:avLst/>
+          </a:prstGeom>
+          <a:solidFill>
+            <a:schemeClr val="bg1">
+              <a:lumMod val="95000"/>
+            </a:schemeClr>
+          </a:solidFill>
+          <a:ln w="28575">
+            <a:solidFill>
+              <a:srgbClr val="E0700D"/>
+            </a:solidFill>
+          </a:ln>
+        </p:spPr>
+        <p:txBody>
+          <a:bodyPr wrap="square" rtlCol="0">
+            <a:spAutoFit/>
+          </a:bodyPr>
+          <a:lstStyle/>
+          <a:p>
+            <a:pPr algn="just"/>
+            <a:r>
+              <a:rPr lang="en-US" sz="1200" dirty="0">
+                <a:latin typeface="Arial" panose="020B0604020202020204" pitchFamily="34" charset="0"/>
+                <a:cs typeface="Arial" panose="020B0604020202020204" pitchFamily="34" charset="0"/>
+              </a:rPr>
+              <a:t>Comment results, which is the safe radius, consider safe means less than 0.1 dB/90º.</a:t>
+            </a:r>
+          </a:p>
+          <a:p>
+            <a:pPr algn="just"/>
+            <a:endParaRPr lang="en-US" sz="1200" u="sng" dirty="0">
+              <a:latin typeface="Arial" panose="020B0604020202020204" pitchFamily="34" charset="0"/>
+              <a:cs typeface="Arial" panose="020B0604020202020204" pitchFamily="34" charset="0"/>
+            </a:endParaRPr>
+          </a:p>
+          <a:p>
+            <a:pPr algn="just"/>
+            <a:endParaRPr lang="en-US" sz="1200" dirty="0">
+              <a:latin typeface="Arial" panose="020B0604020202020204" pitchFamily="34" charset="0"/>
+              <a:cs typeface="Arial" panose="020B0604020202020204" pitchFamily="34" charset="0"/>
+            </a:endParaRPr>
+          </a:p>
+          <a:p>
+            <a:pPr algn="just"/>
+            <a:endParaRPr lang="en-US" sz="1200" dirty="0">
+              <a:latin typeface="Arial" panose="020B0604020202020204" pitchFamily="34" charset="0"/>
+              <a:cs typeface="Arial" panose="020B0604020202020204" pitchFamily="34" charset="0"/>
+            </a:endParaRPr>
+          </a:p>
+          <a:p>
+            <a:pPr algn="just"/>
+            <a:endParaRPr lang="en-US" sz="1200" dirty="0">
+              <a:latin typeface="Arial" panose="020B0604020202020204" pitchFamily="34" charset="0"/>
+              <a:cs typeface="Arial" panose="020B0604020202020204" pitchFamily="34" charset="0"/>
+            </a:endParaRPr>
+          </a:p>
+          <a:p>
+            <a:pPr algn="just"/>
+            <a:endParaRPr lang="en-US" sz="1200" dirty="0">
+              <a:latin typeface="Arial" panose="020B0604020202020204" pitchFamily="34" charset="0"/>
+              <a:cs typeface="Arial" panose="020B0604020202020204" pitchFamily="34" charset="0"/>
+            </a:endParaRPr>
+          </a:p>
+        </p:txBody>
+      </p:sp>
+      <mc:AlternateContent xmlns:mc="http://schemas.openxmlformats.org/markup-compatibility/2006" xmlns:a14="http://schemas.microsoft.com/office/drawing/2010/main">
+        <mc:Choice Requires="a14">
+          <p:sp>
+            <p:nvSpPr>
+              <p:cNvPr id="6" name="CuadroTexto 5">
+                <a:extLst>
+                  <a:ext uri="{FF2B5EF4-FFF2-40B4-BE49-F238E27FC236}">
+                    <a16:creationId xmlns:a16="http://schemas.microsoft.com/office/drawing/2014/main" id="{C5941928-F5C1-1E8E-94AE-FCD9BD134D79}"/>
+                  </a:ext>
+                </a:extLst>
+              </p:cNvPr>
+              <p:cNvSpPr txBox="1"/>
+              <p:nvPr/>
+            </p:nvSpPr>
+            <p:spPr>
+              <a:xfrm>
+                <a:off x="10377883" y="3848100"/>
+                <a:ext cx="1856534" cy="439608"/>
+              </a:xfrm>
+              <a:prstGeom prst="rect">
+                <a:avLst/>
+              </a:prstGeom>
+              <a:noFill/>
+            </p:spPr>
+            <p:txBody>
+              <a:bodyPr wrap="none" lIns="0" tIns="0" rIns="0" bIns="0" rtlCol="0">
+                <a:spAutoFit/>
+              </a:bodyPr>
+              <a:lstStyle/>
+              <a:p>
+                <a14:m>
+                  <m:oMath xmlns:m="http://schemas.openxmlformats.org/officeDocument/2006/math">
+                    <m:r>
+                      <a:rPr lang="es-ES" sz="1800" b="0" i="1" smtClean="0">
+                        <a:latin typeface="Cambria Math" panose="02040503050406030204" pitchFamily="18" charset="0"/>
+                      </a:rPr>
+                      <m:t>𝛼</m:t>
+                    </m:r>
+                    <m:d>
+                      <m:dPr>
+                        <m:begChr m:val="["/>
+                        <m:endChr m:val="]"/>
+                        <m:ctrlPr>
+                          <a:rPr lang="es-ES" sz="1800" b="0" i="1" smtClean="0">
+                            <a:latin typeface="Cambria Math" panose="02040503050406030204" pitchFamily="18" charset="0"/>
+                          </a:rPr>
+                        </m:ctrlPr>
+                      </m:dPr>
+                      <m:e>
+                        <m:f>
+                          <m:fPr>
+                            <m:ctrlPr>
+                              <a:rPr lang="es-ES" sz="1800" b="0" i="1" smtClean="0">
+                                <a:latin typeface="Cambria Math" panose="02040503050406030204" pitchFamily="18" charset="0"/>
+                              </a:rPr>
+                            </m:ctrlPr>
+                          </m:fPr>
+                          <m:num>
+                            <m:r>
+                              <a:rPr lang="es-ES" sz="1800" b="0" i="1" smtClean="0">
+                                <a:latin typeface="Cambria Math" panose="02040503050406030204" pitchFamily="18" charset="0"/>
+                              </a:rPr>
+                              <m:t>𝑑𝐵</m:t>
+                            </m:r>
+                          </m:num>
+                          <m:den>
+                            <m:r>
+                              <a:rPr lang="es-ES" sz="1800" b="0" i="1" smtClean="0">
+                                <a:latin typeface="Cambria Math" panose="02040503050406030204" pitchFamily="18" charset="0"/>
+                              </a:rPr>
+                              <m:t>90</m:t>
+                            </m:r>
+                            <m:r>
+                              <a:rPr lang="es-ES" sz="1800" b="0" i="1" smtClean="0">
+                                <a:latin typeface="Cambria Math" panose="02040503050406030204" pitchFamily="18" charset="0"/>
+                                <a:ea typeface="Cambria Math" panose="02040503050406030204" pitchFamily="18" charset="0"/>
+                              </a:rPr>
+                              <m:t>°</m:t>
+                            </m:r>
+                          </m:den>
+                        </m:f>
+                      </m:e>
+                    </m:d>
+                    <m:r>
+                      <a:rPr lang="es-ES" sz="1800" b="0" i="1" smtClean="0">
+                        <a:latin typeface="Cambria Math" panose="02040503050406030204" pitchFamily="18" charset="0"/>
+                      </a:rPr>
+                      <m:t>=</m:t>
+                    </m:r>
+                  </m:oMath>
+                </a14:m>
+                <a:r>
+                  <a:rPr lang="es-ES" sz="1800" dirty="0"/>
+                  <a:t> </a:t>
+                </a:r>
+                <a14:m>
+                  <m:oMath xmlns:m="http://schemas.openxmlformats.org/officeDocument/2006/math">
+                    <m:r>
+                      <m:rPr>
+                        <m:sty m:val="p"/>
+                      </m:rPr>
+                      <a:rPr lang="es-ES" sz="1800" b="0" i="0" smtClean="0">
+                        <a:latin typeface="Cambria Math" panose="02040503050406030204" pitchFamily="18" charset="0"/>
+                      </a:rPr>
+                      <m:t>R</m:t>
+                    </m:r>
+                    <m:f>
+                      <m:fPr>
+                        <m:ctrlPr>
+                          <a:rPr lang="es-ES" sz="1800" b="0" i="1" smtClean="0">
+                            <a:latin typeface="Cambria Math" panose="02040503050406030204" pitchFamily="18" charset="0"/>
+                          </a:rPr>
+                        </m:ctrlPr>
+                      </m:fPr>
+                      <m:num>
+                        <m:r>
+                          <a:rPr lang="es-ES" sz="1800" b="0" i="1" smtClean="0">
+                            <a:latin typeface="Cambria Math" panose="02040503050406030204" pitchFamily="18" charset="0"/>
+                          </a:rPr>
+                          <m:t>𝜋</m:t>
+                        </m:r>
+                      </m:num>
+                      <m:den>
+                        <m:r>
+                          <a:rPr lang="es-ES" sz="1800" b="0" i="1" smtClean="0">
+                            <a:latin typeface="Cambria Math" panose="02040503050406030204" pitchFamily="18" charset="0"/>
+                          </a:rPr>
+                          <m:t>2</m:t>
+                        </m:r>
+                      </m:den>
+                    </m:f>
+                    <m:r>
+                      <a:rPr lang="es-ES" sz="1800" i="1">
+                        <a:latin typeface="Cambria Math" panose="02040503050406030204" pitchFamily="18" charset="0"/>
+                      </a:rPr>
+                      <m:t>𝛼</m:t>
+                    </m:r>
+                    <m:d>
+                      <m:dPr>
+                        <m:begChr m:val="["/>
+                        <m:endChr m:val="]"/>
+                        <m:ctrlPr>
+                          <a:rPr lang="es-ES" sz="1800" i="1">
+                            <a:latin typeface="Cambria Math" panose="02040503050406030204" pitchFamily="18" charset="0"/>
+                          </a:rPr>
+                        </m:ctrlPr>
+                      </m:dPr>
+                      <m:e>
+                        <m:f>
+                          <m:fPr>
+                            <m:ctrlPr>
+                              <a:rPr lang="es-ES" sz="1800" i="1">
+                                <a:latin typeface="Cambria Math" panose="02040503050406030204" pitchFamily="18" charset="0"/>
+                              </a:rPr>
+                            </m:ctrlPr>
+                          </m:fPr>
+                          <m:num>
+                            <m:r>
+                              <a:rPr lang="es-ES" sz="1800" i="1">
+                                <a:latin typeface="Cambria Math" panose="02040503050406030204" pitchFamily="18" charset="0"/>
+                              </a:rPr>
+                              <m:t>𝑑𝐵</m:t>
+                            </m:r>
+                          </m:num>
+                          <m:den>
+                            <m:r>
+                              <a:rPr lang="es-ES" sz="1800" i="1">
+                                <a:latin typeface="Cambria Math" panose="02040503050406030204" pitchFamily="18" charset="0"/>
+                              </a:rPr>
+                              <m:t>µ</m:t>
+                            </m:r>
+                            <m:r>
+                              <a:rPr lang="es-ES" sz="1800" i="1">
+                                <a:latin typeface="Cambria Math" panose="02040503050406030204" pitchFamily="18" charset="0"/>
+                              </a:rPr>
+                              <m:t>𝑚</m:t>
+                            </m:r>
+                          </m:den>
+                        </m:f>
+                      </m:e>
+                    </m:d>
+                  </m:oMath>
+                </a14:m>
+                <a:endParaRPr lang="en-US" sz="1800" dirty="0"/>
+              </a:p>
+            </p:txBody>
+          </p:sp>
+        </mc:Choice>
+        <mc:Fallback xmlns="">
+          <p:sp>
+            <p:nvSpPr>
+              <p:cNvPr id="6" name="CuadroTexto 5">
+                <a:extLst>
+                  <a:ext uri="{FF2B5EF4-FFF2-40B4-BE49-F238E27FC236}">
+                    <a16:creationId xmlns:a16="http://schemas.microsoft.com/office/drawing/2014/main" id="{C5941928-F5C1-1E8E-94AE-FCD9BD134D79}"/>
+                  </a:ext>
+                </a:extLst>
+              </p:cNvPr>
+              <p:cNvSpPr txBox="1">
+                <a:spLocks noRot="1" noChangeAspect="1" noMove="1" noResize="1" noEditPoints="1" noAdjustHandles="1" noChangeArrowheads="1" noChangeShapeType="1" noTextEdit="1"/>
+              </p:cNvSpPr>
+              <p:nvPr/>
+            </p:nvSpPr>
+            <p:spPr>
+              <a:xfrm>
+                <a:off x="10377883" y="3848100"/>
+                <a:ext cx="1856534" cy="439608"/>
+              </a:xfrm>
+              <a:prstGeom prst="rect">
+                <a:avLst/>
+              </a:prstGeom>
+              <a:blipFill>
+                <a:blip r:embed="rId5"/>
+                <a:stretch>
+                  <a:fillRect l="-3279" b="-13889"/>
+                </a:stretch>
+              </a:blipFill>
+            </p:spPr>
+            <p:txBody>
+              <a:bodyPr/>
+              <a:lstStyle/>
+              <a:p>
+                <a:r>
+                  <a:rPr lang="es-ES">
+                    <a:noFill/>
+                  </a:rPr>
+                  <a:t> </a:t>
+                </a:r>
+              </a:p>
+            </p:txBody>
+          </p:sp>
+        </mc:Fallback>
+      </mc:AlternateContent>
+      <p:pic>
+        <p:nvPicPr>
+          <p:cNvPr id="7" name="Imagen 6" descr="Texto&#10;&#10;El contenido generado por IA puede ser incorrecto.">
+            <a:extLst>
+              <a:ext uri="{FF2B5EF4-FFF2-40B4-BE49-F238E27FC236}">
+                <a16:creationId xmlns:a16="http://schemas.microsoft.com/office/drawing/2014/main" id="{606E7E47-39DC-EA74-1A63-67FCA1B8F390}"/>
+              </a:ext>
+            </a:extLst>
+          </p:cNvPr>
+          <p:cNvPicPr>
+            <a:picLocks noChangeAspect="1"/>
+          </p:cNvPicPr>
+          <p:nvPr/>
+        </p:nvPicPr>
+        <p:blipFill>
+          <a:blip r:embed="rId6"/>
+          <a:stretch>
+            <a:fillRect/>
+          </a:stretch>
+        </p:blipFill>
+        <p:spPr>
+          <a:xfrm>
+            <a:off x="715818" y="1794319"/>
+            <a:ext cx="9631119" cy="2105319"/>
+          </a:xfrm>
+          <a:prstGeom prst="rect">
+            <a:avLst/>
+          </a:prstGeom>
+        </p:spPr>
+      </p:pic>
+    </p:spTree>
+    <p:extLst>
+      <p:ext uri="{BB962C8B-B14F-4D97-AF65-F5344CB8AC3E}">
+        <p14:creationId xmlns:p14="http://schemas.microsoft.com/office/powerpoint/2010/main" val="3186080371"/>
+      </p:ext>
+    </p:extLst>
+  </p:cSld>
+  <p:clrMapOvr>
+    <a:masterClrMapping/>
+  </p:clrMapOvr>
+</p:sld>
+</file>
+
+<file path=ppt/slides/slide21.xml><?xml version="1.0" encoding="utf-8"?>
+<p:sld xmlns:a="http://schemas.openxmlformats.org/drawingml/2006/main" xmlns:r="http://schemas.openxmlformats.org/officeDocument/2006/relationships" xmlns:p="http://schemas.openxmlformats.org/presentationml/2006/main">
+  <p:cSld>
+    <p:spTree>
+      <p:nvGrpSpPr>
+        <p:cNvPr id="1" name=""/>
+        <p:cNvGrpSpPr/>
+        <p:nvPr/>
+      </p:nvGrpSpPr>
+      <p:grpSpPr>
+        <a:xfrm>
+          <a:off x="0" y="0"/>
+          <a:ext cx="0" cy="0"/>
+          <a:chOff x="0" y="0"/>
+          <a:chExt cx="0" cy="0"/>
+        </a:xfrm>
+      </p:grpSpPr>
+      <p:sp>
+        <p:nvSpPr>
+          <p:cNvPr id="3" name="object 3"/>
+          <p:cNvSpPr/>
+          <p:nvPr/>
+        </p:nvSpPr>
+        <p:spPr>
+          <a:xfrm>
+            <a:off x="3945635" y="2636520"/>
+            <a:ext cx="8246363" cy="1584959"/>
+          </a:xfrm>
+          <a:prstGeom prst="rect">
+            <a:avLst/>
+          </a:prstGeom>
+          <a:blipFill>
+            <a:blip r:embed="rId2" cstate="print"/>
+            <a:stretch>
+              <a:fillRect/>
+            </a:stretch>
+          </a:blipFill>
+        </p:spPr>
+        <p:txBody>
+          <a:bodyPr wrap="square" lIns="0" tIns="0" rIns="0" bIns="0" rtlCol="0"/>
+          <a:lstStyle/>
+          <a:p>
+            <a:endParaRPr/>
+          </a:p>
+        </p:txBody>
+      </p:sp>
+      <p:sp>
+        <p:nvSpPr>
+          <p:cNvPr id="4" name="object 4"/>
+          <p:cNvSpPr txBox="1">
+            <a:spLocks noGrp="1"/>
+          </p:cNvSpPr>
+          <p:nvPr>
+            <p:ph type="title"/>
+          </p:nvPr>
+        </p:nvSpPr>
+        <p:spPr>
+          <a:xfrm>
+            <a:off x="4513326" y="3165729"/>
+            <a:ext cx="2233295" cy="513715"/>
+          </a:xfrm>
+          <a:prstGeom prst="rect">
+            <a:avLst/>
+          </a:prstGeom>
+        </p:spPr>
+        <p:txBody>
+          <a:bodyPr vert="horz" wrap="square" lIns="0" tIns="13335" rIns="0" bIns="0" rtlCol="0">
+            <a:spAutoFit/>
+          </a:bodyPr>
+          <a:lstStyle/>
+          <a:p>
+            <a:pPr marL="12700">
+              <a:lnSpc>
+                <a:spcPct val="100000"/>
+              </a:lnSpc>
+              <a:spcBef>
+                <a:spcPts val="105"/>
+              </a:spcBef>
+            </a:pPr>
+            <a:r>
+              <a:rPr sz="3200" b="1" spc="-5" dirty="0">
+                <a:solidFill>
+                  <a:srgbClr val="FFFFFF"/>
+                </a:solidFill>
+                <a:latin typeface="Lucida Sans"/>
+                <a:cs typeface="Lucida Sans"/>
+              </a:rPr>
+              <a:t>Thank</a:t>
+            </a:r>
+            <a:r>
+              <a:rPr sz="3200" b="1" spc="-55" dirty="0">
+                <a:solidFill>
+                  <a:srgbClr val="FFFFFF"/>
+                </a:solidFill>
+                <a:latin typeface="Lucida Sans"/>
+                <a:cs typeface="Lucida Sans"/>
+              </a:rPr>
+              <a:t> </a:t>
+            </a:r>
+            <a:r>
+              <a:rPr sz="3200" b="1" dirty="0">
+                <a:solidFill>
+                  <a:srgbClr val="FFFFFF"/>
+                </a:solidFill>
+                <a:latin typeface="Lucida Sans"/>
+                <a:cs typeface="Lucida Sans"/>
+              </a:rPr>
+              <a:t>you</a:t>
+            </a:r>
+            <a:endParaRPr sz="3200">
+              <a:latin typeface="Lucida Sans"/>
+              <a:cs typeface="Lucida Sans"/>
+            </a:endParaRPr>
+          </a:p>
+        </p:txBody>
+      </p:sp>
+      <p:sp>
+        <p:nvSpPr>
+          <p:cNvPr id="5" name="Marcador de número de diapositiva 4">
+            <a:extLst>
+              <a:ext uri="{FF2B5EF4-FFF2-40B4-BE49-F238E27FC236}">
+                <a16:creationId xmlns:a16="http://schemas.microsoft.com/office/drawing/2014/main" id="{B052DA19-AD24-7D24-2AE9-51F8F5A7F5E0}"/>
+              </a:ext>
+            </a:extLst>
+          </p:cNvPr>
+          <p:cNvSpPr>
+            <a:spLocks noGrp="1"/>
+          </p:cNvSpPr>
+          <p:nvPr>
+            <p:ph type="sldNum" sz="quarter" idx="7"/>
+          </p:nvPr>
+        </p:nvSpPr>
+        <p:spPr/>
+        <p:txBody>
+          <a:bodyPr/>
+          <a:lstStyle/>
+          <a:p>
+            <a:fld id="{B6F15528-21DE-4FAA-801E-634DDDAF4B2B}" type="slidenum">
+              <a:rPr lang="es-ES" smtClean="0"/>
+              <a:t>21</a:t>
+            </a:fld>
+            <a:endParaRPr lang="es-ES"/>
+          </a:p>
+        </p:txBody>
+      </p:sp>
+    </p:spTree>
   </p:cSld>
   <p:clrMapOvr>
     <a:masterClrMapping/>
@@ -16056,8 +18495,8 @@
           <a:chExt cx="0" cy="0"/>
         </a:xfrm>
       </p:grpSpPr>
-      <mc:AlternateContent xmlns:mc="http://schemas.openxmlformats.org/markup-compatibility/2006">
-        <mc:Choice xmlns:a14="http://schemas.microsoft.com/office/drawing/2010/main" Requires="a14">
+      <mc:AlternateContent xmlns:mc="http://schemas.openxmlformats.org/markup-compatibility/2006" xmlns:a14="http://schemas.microsoft.com/office/drawing/2010/main">
+        <mc:Choice Requires="a14">
           <p:sp>
             <p:nvSpPr>
               <p:cNvPr id="16" name="object 16">
@@ -16384,7 +18823,7 @@
             </p:txBody>
           </p:sp>
         </mc:Choice>
-        <mc:Fallback>
+        <mc:Fallback xmlns="">
           <p:sp>
             <p:nvSpPr>
               <p:cNvPr id="16" name="object 16">
@@ -16530,8 +18969,8 @@
           </a:p>
         </p:txBody>
       </p:sp>
-      <mc:AlternateContent xmlns:mc="http://schemas.openxmlformats.org/markup-compatibility/2006">
-        <mc:Choice xmlns:a14="http://schemas.microsoft.com/office/drawing/2010/main" Requires="a14">
+      <mc:AlternateContent xmlns:mc="http://schemas.openxmlformats.org/markup-compatibility/2006" xmlns:a14="http://schemas.microsoft.com/office/drawing/2010/main">
+        <mc:Choice Requires="a14">
           <p:sp>
             <p:nvSpPr>
               <p:cNvPr id="2" name="CuadroTexto 1">
@@ -16996,7 +19435,7 @@
             </p:txBody>
           </p:sp>
         </mc:Choice>
-        <mc:Fallback>
+        <mc:Fallback xmlns="">
           <p:sp>
             <p:nvSpPr>
               <p:cNvPr id="2" name="CuadroTexto 1">
@@ -17150,8 +19589,8 @@
           </a:p>
         </p:txBody>
       </p:sp>
-      <mc:AlternateContent xmlns:mc="http://schemas.openxmlformats.org/markup-compatibility/2006">
-        <mc:Choice xmlns:a14="http://schemas.microsoft.com/office/drawing/2010/main" Requires="a14">
+      <mc:AlternateContent xmlns:mc="http://schemas.openxmlformats.org/markup-compatibility/2006" xmlns:a14="http://schemas.microsoft.com/office/drawing/2010/main">
+        <mc:Choice Requires="a14">
           <p:sp>
             <p:nvSpPr>
               <p:cNvPr id="9" name="CuadroTexto 8">
@@ -17251,7 +19690,7 @@
             </p:txBody>
           </p:sp>
         </mc:Choice>
-        <mc:Fallback>
+        <mc:Fallback xmlns="">
           <p:sp>
             <p:nvSpPr>
               <p:cNvPr id="9" name="CuadroTexto 8">
@@ -17296,8 +19735,8 @@
           </p:sp>
         </mc:Fallback>
       </mc:AlternateContent>
-      <mc:AlternateContent xmlns:mc="http://schemas.openxmlformats.org/markup-compatibility/2006">
-        <mc:Choice xmlns:a14="http://schemas.microsoft.com/office/drawing/2010/main" Requires="a14">
+      <mc:AlternateContent xmlns:mc="http://schemas.openxmlformats.org/markup-compatibility/2006" xmlns:a14="http://schemas.microsoft.com/office/drawing/2010/main">
+        <mc:Choice Requires="a14">
           <p:sp>
             <p:nvSpPr>
               <p:cNvPr id="10" name="CuadroTexto 9">
@@ -17397,7 +19836,7 @@
             </p:txBody>
           </p:sp>
         </mc:Choice>
-        <mc:Fallback>
+        <mc:Fallback xmlns="">
           <p:sp>
             <p:nvSpPr>
               <p:cNvPr id="10" name="CuadroTexto 9">
@@ -17527,8 +19966,8 @@
           <a:chExt cx="0" cy="0"/>
         </a:xfrm>
       </p:grpSpPr>
-      <mc:AlternateContent xmlns:mc="http://schemas.openxmlformats.org/markup-compatibility/2006">
-        <mc:Choice xmlns:a14="http://schemas.microsoft.com/office/drawing/2010/main" Requires="a14">
+      <mc:AlternateContent xmlns:mc="http://schemas.openxmlformats.org/markup-compatibility/2006" xmlns:a14="http://schemas.microsoft.com/office/drawing/2010/main">
+        <mc:Choice Requires="a14">
           <p:sp>
             <p:nvSpPr>
               <p:cNvPr id="16" name="object 16">
@@ -17855,7 +20294,7 @@
             </p:txBody>
           </p:sp>
         </mc:Choice>
-        <mc:Fallback>
+        <mc:Fallback xmlns="">
           <p:sp>
             <p:nvSpPr>
               <p:cNvPr id="16" name="object 16">
@@ -18218,8 +20657,8 @@
           </a:p>
         </p:txBody>
       </p:sp>
-      <mc:AlternateContent xmlns:mc="http://schemas.openxmlformats.org/markup-compatibility/2006">
-        <mc:Choice xmlns:a14="http://schemas.microsoft.com/office/drawing/2010/main" Requires="a14">
+      <mc:AlternateContent xmlns:mc="http://schemas.openxmlformats.org/markup-compatibility/2006" xmlns:a14="http://schemas.microsoft.com/office/drawing/2010/main">
+        <mc:Choice Requires="a14">
           <p:sp>
             <p:nvSpPr>
               <p:cNvPr id="21" name="CuadroTexto 20">
@@ -18644,7 +21083,7 @@
             </p:txBody>
           </p:sp>
         </mc:Choice>
-        <mc:Fallback>
+        <mc:Fallback xmlns="">
           <p:sp>
             <p:nvSpPr>
               <p:cNvPr id="21" name="CuadroTexto 20">
@@ -18725,8 +21164,8 @@
           <a:chExt cx="0" cy="0"/>
         </a:xfrm>
       </p:grpSpPr>
-      <mc:AlternateContent xmlns:mc="http://schemas.openxmlformats.org/markup-compatibility/2006">
-        <mc:Choice xmlns:a14="http://schemas.microsoft.com/office/drawing/2010/main" Requires="a14">
+      <mc:AlternateContent xmlns:mc="http://schemas.openxmlformats.org/markup-compatibility/2006" xmlns:a14="http://schemas.microsoft.com/office/drawing/2010/main">
+        <mc:Choice Requires="a14">
           <p:sp>
             <p:nvSpPr>
               <p:cNvPr id="16" name="object 16">
@@ -19053,7 +21492,7 @@
             </p:txBody>
           </p:sp>
         </mc:Choice>
-        <mc:Fallback>
+        <mc:Fallback xmlns="">
           <p:sp>
             <p:nvSpPr>
               <p:cNvPr id="16" name="object 16">
@@ -19283,8 +21722,8 @@
           </a:p>
         </p:txBody>
       </p:sp>
-      <mc:AlternateContent xmlns:mc="http://schemas.openxmlformats.org/markup-compatibility/2006">
-        <mc:Choice xmlns:a14="http://schemas.microsoft.com/office/drawing/2010/main" Requires="a14">
+      <mc:AlternateContent xmlns:mc="http://schemas.openxmlformats.org/markup-compatibility/2006" xmlns:a14="http://schemas.microsoft.com/office/drawing/2010/main">
+        <mc:Choice Requires="a14">
           <p:sp>
             <p:nvSpPr>
               <p:cNvPr id="21" name="CuadroTexto 20">
@@ -19709,7 +22148,7 @@
             </p:txBody>
           </p:sp>
         </mc:Choice>
-        <mc:Fallback>
+        <mc:Fallback xmlns="">
           <p:sp>
             <p:nvSpPr>
               <p:cNvPr id="21" name="CuadroTexto 20">
@@ -20002,8 +22441,8 @@
           <a:chExt cx="0" cy="0"/>
         </a:xfrm>
       </p:grpSpPr>
-      <mc:AlternateContent xmlns:mc="http://schemas.openxmlformats.org/markup-compatibility/2006">
-        <mc:Choice xmlns:a14="http://schemas.microsoft.com/office/drawing/2010/main" Requires="a14">
+      <mc:AlternateContent xmlns:mc="http://schemas.openxmlformats.org/markup-compatibility/2006" xmlns:a14="http://schemas.microsoft.com/office/drawing/2010/main">
+        <mc:Choice Requires="a14">
           <p:sp>
             <p:nvSpPr>
               <p:cNvPr id="16" name="object 16">
@@ -20330,7 +22769,7 @@
             </p:txBody>
           </p:sp>
         </mc:Choice>
-        <mc:Fallback>
+        <mc:Fallback xmlns="">
           <p:sp>
             <p:nvSpPr>
               <p:cNvPr id="16" name="object 16">
@@ -20638,8 +23077,8 @@
           </a:p>
         </p:txBody>
       </p:sp>
-      <mc:AlternateContent xmlns:mc="http://schemas.openxmlformats.org/markup-compatibility/2006">
-        <mc:Choice xmlns:a14="http://schemas.microsoft.com/office/drawing/2010/main" Requires="a14">
+      <mc:AlternateContent xmlns:mc="http://schemas.openxmlformats.org/markup-compatibility/2006" xmlns:a14="http://schemas.microsoft.com/office/drawing/2010/main">
+        <mc:Choice Requires="a14">
           <p:sp>
             <p:nvSpPr>
               <p:cNvPr id="21" name="CuadroTexto 20">
@@ -21064,7 +23503,7 @@
             </p:txBody>
           </p:sp>
         </mc:Choice>
-        <mc:Fallback>
+        <mc:Fallback xmlns="">
           <p:sp>
             <p:nvSpPr>
               <p:cNvPr id="21" name="CuadroTexto 20">

--- a/LabBook_10.pptx
+++ b/LabBook_10.pptx
@@ -402,7 +402,7 @@
           <a:p>
             <a:fld id="{8438F8DC-35B0-48E6-A86E-42F1F08DD00F}" type="datetimeFigureOut">
               <a:rPr lang="es-ES" smtClean="0"/>
-              <a:t>01/03/2026</a:t>
+              <a:t>02/03/2026</a:t>
             </a:fld>
             <a:endParaRPr lang="es-ES"/>
           </a:p>
@@ -579,7 +579,7 @@
           <a:p>
             <a:fld id="{FACBDC12-F39B-4B97-8F4D-6734F9D366FF}" type="datetimeFigureOut">
               <a:rPr lang="es-ES" smtClean="0"/>
-              <a:t>01/03/2026</a:t>
+              <a:t>02/03/2026</a:t>
             </a:fld>
             <a:endParaRPr lang="es-ES"/>
           </a:p>
@@ -3851,7 +3851,7 @@
                 <a:latin typeface="Arial"/>
                 <a:cs typeface="Arial"/>
               </a:rPr>
-              <a:t>: </a:t>
+              <a:t>: Roberto Fernández Sevilla </a:t>
             </a:r>
             <a:endParaRPr sz="1800" dirty="0">
               <a:latin typeface="Arial"/>
@@ -15594,7 +15594,7 @@
         <p:spPr>
           <a:xfrm>
             <a:off x="3203766" y="2471214"/>
-            <a:ext cx="6128326" cy="3693319"/>
+            <a:ext cx="6128326" cy="2585323"/>
           </a:xfrm>
           <a:prstGeom prst="rect">
             <a:avLst/>
@@ -15671,11 +15671,107 @@
           <a:p>
             <a:r>
               <a:rPr lang="en-US" dirty="0"/>
-              <a:t>La </a:t>
+              <a:t>Por </a:t>
             </a:r>
             <a:r>
               <a:rPr lang="en-US" dirty="0" err="1"/>
-              <a:t>velocidad</a:t>
+              <a:t>otro</a:t>
+            </a:r>
+            <a:r>
+              <a:rPr lang="en-US" dirty="0"/>
+              <a:t> </a:t>
+            </a:r>
+            <a:r>
+              <a:rPr lang="en-US" dirty="0" err="1"/>
+              <a:t>lado</a:t>
+            </a:r>
+            <a:r>
+              <a:rPr lang="en-US" dirty="0"/>
+              <a:t> </a:t>
+            </a:r>
+            <a:r>
+              <a:rPr lang="en-US" dirty="0" err="1"/>
+              <a:t>el</a:t>
+            </a:r>
+            <a:r>
+              <a:rPr lang="en-US" dirty="0"/>
+              <a:t> </a:t>
+            </a:r>
+            <a:r>
+              <a:rPr lang="en-US" dirty="0" err="1"/>
+              <a:t>segundo</a:t>
+            </a:r>
+            <a:r>
+              <a:rPr lang="en-US" dirty="0"/>
+              <a:t> </a:t>
+            </a:r>
+            <a:r>
+              <a:rPr lang="en-US" dirty="0" err="1"/>
+              <a:t>término</a:t>
+            </a:r>
+            <a:r>
+              <a:rPr lang="en-US" dirty="0"/>
+              <a:t> n2, es </a:t>
+            </a:r>
+            <a:r>
+              <a:rPr lang="en-US" dirty="0" err="1"/>
+              <a:t>el</a:t>
+            </a:r>
+            <a:r>
+              <a:rPr lang="en-US" dirty="0"/>
+              <a:t> </a:t>
+            </a:r>
+            <a:r>
+              <a:rPr lang="en-US" dirty="0" err="1"/>
+              <a:t>que</a:t>
+            </a:r>
+            <a:r>
+              <a:rPr lang="en-US" dirty="0"/>
+              <a:t> </a:t>
+            </a:r>
+            <a:r>
+              <a:rPr lang="en-US" dirty="0" err="1"/>
+              <a:t>nos</a:t>
+            </a:r>
+            <a:r>
+              <a:rPr lang="en-US" dirty="0"/>
+              <a:t> dice </a:t>
+            </a:r>
+            <a:r>
+              <a:rPr lang="en-US" dirty="0" err="1"/>
+              <a:t>si</a:t>
+            </a:r>
+            <a:r>
+              <a:rPr lang="en-US" dirty="0"/>
+              <a:t> varia </a:t>
+            </a:r>
+            <a:r>
+              <a:rPr lang="en-US" dirty="0" err="1"/>
+              <a:t>más</a:t>
+            </a:r>
+            <a:r>
+              <a:rPr lang="en-US" dirty="0"/>
+              <a:t> o </a:t>
+            </a:r>
+            <a:r>
+              <a:rPr lang="en-US" dirty="0" err="1"/>
+              <a:t>menos</a:t>
+            </a:r>
+            <a:r>
+              <a:rPr lang="en-US" dirty="0"/>
+              <a:t> </a:t>
+            </a:r>
+            <a:r>
+              <a:rPr lang="en-US" dirty="0" err="1"/>
+              <a:t>el</a:t>
+            </a:r>
+            <a:r>
+              <a:rPr lang="en-US" dirty="0"/>
+              <a:t> </a:t>
+            </a:r>
+            <a:r>
+              <a:rPr lang="en-US" dirty="0" err="1"/>
+              <a:t>índice</a:t>
             </a:r>
             <a:r>
               <a:rPr lang="en-US" dirty="0"/>
@@ -15683,7 +15779,23 @@
             </a:r>
             <a:r>
               <a:rPr lang="en-US" dirty="0" err="1"/>
-              <a:t>fase</a:t>
+              <a:t>grupo</a:t>
+            </a:r>
+            <a:r>
+              <a:rPr lang="en-US" dirty="0"/>
+              <a:t>, y </a:t>
+            </a:r>
+            <a:r>
+              <a:rPr lang="en-US" dirty="0" err="1"/>
+              <a:t>por</a:t>
+            </a:r>
+            <a:r>
+              <a:rPr lang="en-US" dirty="0"/>
+              <a:t> tanto </a:t>
+            </a:r>
+            <a:r>
+              <a:rPr lang="en-US" dirty="0" err="1"/>
+              <a:t>si</a:t>
             </a:r>
             <a:r>
               <a:rPr lang="en-US" dirty="0"/>
@@ -15691,15 +15803,89 @@
             </a:r>
             <a:r>
               <a:rPr lang="en-US" dirty="0" err="1"/>
-              <a:t>depende</a:t>
+              <a:t>aumenta</a:t>
             </a:r>
             <a:r>
               <a:rPr lang="en-US" dirty="0"/>
-              <a:t> del </a:t>
+              <a:t> </a:t>
             </a:r>
             <a:r>
               <a:rPr lang="en-US" dirty="0" err="1"/>
-              <a:t>neff</a:t>
+              <a:t>más</a:t>
+            </a:r>
+            <a:r>
+              <a:rPr lang="en-US" dirty="0"/>
+              <a:t> o </a:t>
+            </a:r>
+            <a:r>
+              <a:rPr lang="en-US" dirty="0" err="1"/>
+              <a:t>menos</a:t>
+            </a:r>
+            <a:r>
+              <a:rPr lang="en-US" dirty="0"/>
+              <a:t> </a:t>
+            </a:r>
+            <a:r>
+              <a:rPr lang="en-US" dirty="0" err="1"/>
+              <a:t>el</a:t>
+            </a:r>
+            <a:r>
+              <a:rPr lang="en-US" dirty="0"/>
+              <a:t> </a:t>
+            </a:r>
+            <a:r>
+              <a:rPr lang="en-US" dirty="0" err="1"/>
+              <a:t>retardo</a:t>
+            </a:r>
+            <a:r>
+              <a:rPr lang="en-US" dirty="0"/>
+              <a:t> de </a:t>
+            </a:r>
+            <a:r>
+              <a:rPr lang="en-US" dirty="0" err="1"/>
+              <a:t>grupo</a:t>
+            </a:r>
+            <a:r>
+              <a:rPr lang="en-US" dirty="0"/>
+              <a:t> </a:t>
+            </a:r>
+            <a:r>
+              <a:rPr lang="en-US" dirty="0" err="1"/>
+              <a:t>en</a:t>
+            </a:r>
+            <a:r>
+              <a:rPr lang="en-US" dirty="0"/>
+              <a:t> </a:t>
+            </a:r>
+            <a:r>
+              <a:rPr lang="en-US" dirty="0" err="1"/>
+              <a:t>última</a:t>
+            </a:r>
+            <a:r>
+              <a:rPr lang="en-US" dirty="0"/>
+              <a:t> </a:t>
+            </a:r>
+            <a:r>
+              <a:rPr lang="en-US" dirty="0" err="1"/>
+              <a:t>instancia</a:t>
+            </a:r>
+            <a:r>
+              <a:rPr lang="en-US" dirty="0"/>
+              <a:t>. </a:t>
+            </a:r>
+          </a:p>
+          <a:p>
+            <a:r>
+              <a:rPr lang="en-US" dirty="0" err="1"/>
+              <a:t>Respecto</a:t>
+            </a:r>
+            <a:r>
+              <a:rPr lang="en-US" dirty="0"/>
+              <a:t> al valor de </a:t>
+            </a:r>
+            <a:r>
+              <a:rPr lang="en-US" dirty="0" err="1"/>
+              <a:t>Dispersión</a:t>
             </a:r>
             <a:r>
               <a:rPr lang="en-US" dirty="0"/>
@@ -15707,39 +15893,7 @@
             </a:r>
             <a:r>
               <a:rPr lang="en-US" dirty="0" err="1"/>
-              <a:t>vp</a:t>
-            </a:r>
-            <a:r>
-              <a:rPr lang="en-US" dirty="0"/>
-              <a:t> = c/</a:t>
-            </a:r>
-            <a:r>
-              <a:rPr lang="en-US" dirty="0" err="1"/>
-              <a:t>neff</a:t>
-            </a:r>
-            <a:r>
-              <a:rPr lang="en-US" dirty="0"/>
-              <a:t>, </a:t>
-            </a:r>
-            <a:r>
-              <a:rPr lang="en-US" dirty="0" err="1"/>
-              <a:t>por</a:t>
-            </a:r>
-            <a:r>
-              <a:rPr lang="en-US" dirty="0"/>
-              <a:t> lo </a:t>
-            </a:r>
-            <a:r>
-              <a:rPr lang="en-US" dirty="0" err="1"/>
               <a:t>que</a:t>
-            </a:r>
-            <a:r>
-              <a:rPr lang="en-US" dirty="0"/>
-              <a:t> a </a:t>
-            </a:r>
-            <a:r>
-              <a:rPr lang="en-US" dirty="0" err="1"/>
-              <a:t>más</a:t>
             </a:r>
             <a:r>
               <a:rPr lang="en-US" dirty="0"/>
@@ -15747,23 +15901,7 @@
             </a:r>
             <a:r>
               <a:rPr lang="en-US" dirty="0" err="1"/>
-              <a:t>neff</a:t>
-            </a:r>
-            <a:r>
-              <a:rPr lang="en-US" dirty="0"/>
-              <a:t>, la </a:t>
-            </a:r>
-            <a:r>
-              <a:rPr lang="en-US" dirty="0" err="1"/>
-              <a:t>velocidad</a:t>
-            </a:r>
-            <a:r>
-              <a:rPr lang="en-US" dirty="0"/>
-              <a:t> de </a:t>
-            </a:r>
-            <a:r>
-              <a:rPr lang="en-US" dirty="0" err="1"/>
-              <a:t>fase</a:t>
+              <a:t>determinará</a:t>
             </a:r>
             <a:r>
               <a:rPr lang="en-US" dirty="0"/>
@@ -15771,15 +15909,15 @@
             </a:r>
             <a:r>
               <a:rPr lang="en-US" dirty="0" err="1"/>
-              <a:t>disminuye</a:t>
+              <a:t>como</a:t>
             </a:r>
             <a:r>
               <a:rPr lang="en-US" dirty="0"/>
-              <a:t>. Como </a:t>
+              <a:t> se </a:t>
             </a:r>
             <a:r>
               <a:rPr lang="en-US" dirty="0" err="1"/>
-              <a:t>vemos</a:t>
+              <a:t>ensancha</a:t>
             </a:r>
             <a:r>
               <a:rPr lang="en-US" dirty="0"/>
@@ -15787,23 +15925,7 @@
             </a:r>
             <a:r>
               <a:rPr lang="en-US" dirty="0" err="1"/>
-              <a:t>en</a:t>
-            </a:r>
-            <a:r>
-              <a:rPr lang="en-US" dirty="0"/>
-              <a:t> la </a:t>
-            </a:r>
-            <a:r>
-              <a:rPr lang="en-US" dirty="0" err="1"/>
-              <a:t>gráfica</a:t>
-            </a:r>
-            <a:r>
-              <a:rPr lang="en-US" dirty="0"/>
-              <a:t> a </a:t>
-            </a:r>
-            <a:r>
-              <a:rPr lang="en-US" dirty="0" err="1"/>
-              <a:t>más</a:t>
+              <a:t>el</a:t>
             </a:r>
             <a:r>
               <a:rPr lang="en-US" dirty="0"/>
@@ -15811,303 +15933,7 @@
             </a:r>
             <a:r>
               <a:rPr lang="en-US" dirty="0" err="1"/>
-              <a:t>longitud</a:t>
-            </a:r>
-            <a:r>
-              <a:rPr lang="en-US" dirty="0"/>
-              <a:t> de </a:t>
-            </a:r>
-            <a:r>
-              <a:rPr lang="en-US" dirty="0" err="1"/>
-              <a:t>onda</a:t>
-            </a:r>
-            <a:r>
-              <a:rPr lang="en-US" dirty="0"/>
-              <a:t> </a:t>
-            </a:r>
-            <a:r>
-              <a:rPr lang="en-US" dirty="0" err="1"/>
-              <a:t>menos</a:t>
-            </a:r>
-            <a:r>
-              <a:rPr lang="en-US" dirty="0"/>
-              <a:t> </a:t>
-            </a:r>
-            <a:r>
-              <a:rPr lang="en-US" dirty="0" err="1"/>
-              <a:t>neff</a:t>
-            </a:r>
-            <a:r>
-              <a:rPr lang="en-US" dirty="0"/>
-              <a:t>, </a:t>
-            </a:r>
-            <a:r>
-              <a:rPr lang="en-US" dirty="0" err="1"/>
-              <a:t>por</a:t>
-            </a:r>
-            <a:r>
-              <a:rPr lang="en-US" dirty="0"/>
-              <a:t> lo </a:t>
-            </a:r>
-            <a:r>
-              <a:rPr lang="en-US" dirty="0" err="1"/>
-              <a:t>que</a:t>
-            </a:r>
-            <a:r>
-              <a:rPr lang="en-US" dirty="0"/>
-              <a:t> </a:t>
-            </a:r>
-            <a:r>
-              <a:rPr lang="en-US" dirty="0" err="1"/>
-              <a:t>tendremos</a:t>
-            </a:r>
-            <a:r>
-              <a:rPr lang="en-US" dirty="0"/>
-              <a:t> </a:t>
-            </a:r>
-            <a:r>
-              <a:rPr lang="en-US" dirty="0" err="1"/>
-              <a:t>más</a:t>
-            </a:r>
-            <a:r>
-              <a:rPr lang="en-US" dirty="0"/>
-              <a:t> </a:t>
-            </a:r>
-            <a:r>
-              <a:rPr lang="en-US" dirty="0" err="1"/>
-              <a:t>velocidad</a:t>
-            </a:r>
-            <a:r>
-              <a:rPr lang="en-US" dirty="0"/>
-              <a:t> de </a:t>
-            </a:r>
-            <a:r>
-              <a:rPr lang="en-US" dirty="0" err="1"/>
-              <a:t>fase</a:t>
-            </a:r>
-            <a:r>
-              <a:rPr lang="en-US" dirty="0"/>
-              <a:t>. </a:t>
-            </a:r>
-          </a:p>
-          <a:p>
-            <a:r>
-              <a:rPr lang="en-US" dirty="0"/>
-              <a:t>Por </a:t>
-            </a:r>
-            <a:r>
-              <a:rPr lang="en-US" dirty="0" err="1"/>
-              <a:t>otro</a:t>
-            </a:r>
-            <a:r>
-              <a:rPr lang="en-US" dirty="0"/>
-              <a:t> </a:t>
-            </a:r>
-            <a:r>
-              <a:rPr lang="en-US" dirty="0" err="1"/>
-              <a:t>lado</a:t>
-            </a:r>
-            <a:r>
-              <a:rPr lang="en-US" dirty="0"/>
-              <a:t> </a:t>
-            </a:r>
-            <a:r>
-              <a:rPr lang="en-US" dirty="0" err="1"/>
-              <a:t>el</a:t>
-            </a:r>
-            <a:r>
-              <a:rPr lang="en-US" dirty="0"/>
-              <a:t> </a:t>
-            </a:r>
-            <a:r>
-              <a:rPr lang="en-US" dirty="0" err="1"/>
-              <a:t>segundo</a:t>
-            </a:r>
-            <a:r>
-              <a:rPr lang="en-US" dirty="0"/>
-              <a:t> </a:t>
-            </a:r>
-            <a:r>
-              <a:rPr lang="en-US" dirty="0" err="1"/>
-              <a:t>término</a:t>
-            </a:r>
-            <a:r>
-              <a:rPr lang="en-US" dirty="0"/>
-              <a:t> n2, es </a:t>
-            </a:r>
-            <a:r>
-              <a:rPr lang="en-US" dirty="0" err="1"/>
-              <a:t>el</a:t>
-            </a:r>
-            <a:r>
-              <a:rPr lang="en-US" dirty="0"/>
-              <a:t> </a:t>
-            </a:r>
-            <a:r>
-              <a:rPr lang="en-US" dirty="0" err="1"/>
-              <a:t>que</a:t>
-            </a:r>
-            <a:r>
-              <a:rPr lang="en-US" dirty="0"/>
-              <a:t> </a:t>
-            </a:r>
-            <a:r>
-              <a:rPr lang="en-US" dirty="0" err="1"/>
-              <a:t>nos</a:t>
-            </a:r>
-            <a:r>
-              <a:rPr lang="en-US" dirty="0"/>
-              <a:t> dice </a:t>
-            </a:r>
-            <a:r>
-              <a:rPr lang="en-US" dirty="0" err="1"/>
-              <a:t>si</a:t>
-            </a:r>
-            <a:r>
-              <a:rPr lang="en-US" dirty="0"/>
-              <a:t> varia </a:t>
-            </a:r>
-            <a:r>
-              <a:rPr lang="en-US" dirty="0" err="1"/>
-              <a:t>más</a:t>
-            </a:r>
-            <a:r>
-              <a:rPr lang="en-US" dirty="0"/>
-              <a:t> o </a:t>
-            </a:r>
-            <a:r>
-              <a:rPr lang="en-US" dirty="0" err="1"/>
-              <a:t>menos</a:t>
-            </a:r>
-            <a:r>
-              <a:rPr lang="en-US" dirty="0"/>
-              <a:t> </a:t>
-            </a:r>
-            <a:r>
-              <a:rPr lang="en-US" dirty="0" err="1"/>
-              <a:t>el</a:t>
-            </a:r>
-            <a:r>
-              <a:rPr lang="en-US" dirty="0"/>
-              <a:t> </a:t>
-            </a:r>
-            <a:r>
-              <a:rPr lang="en-US" dirty="0" err="1"/>
-              <a:t>índice</a:t>
-            </a:r>
-            <a:r>
-              <a:rPr lang="en-US" dirty="0"/>
-              <a:t> de </a:t>
-            </a:r>
-            <a:r>
-              <a:rPr lang="en-US" dirty="0" err="1"/>
-              <a:t>grupo</a:t>
-            </a:r>
-            <a:r>
-              <a:rPr lang="en-US" dirty="0"/>
-              <a:t>, y </a:t>
-            </a:r>
-            <a:r>
-              <a:rPr lang="en-US" dirty="0" err="1"/>
-              <a:t>por</a:t>
-            </a:r>
-            <a:r>
-              <a:rPr lang="en-US" dirty="0"/>
-              <a:t> tanto </a:t>
-            </a:r>
-            <a:r>
-              <a:rPr lang="en-US" dirty="0" err="1"/>
-              <a:t>nos</a:t>
-            </a:r>
-            <a:r>
-              <a:rPr lang="en-US" dirty="0"/>
-              <a:t> </a:t>
-            </a:r>
-            <a:r>
-              <a:rPr lang="en-US" dirty="0" err="1"/>
-              <a:t>dirá</a:t>
-            </a:r>
-            <a:r>
-              <a:rPr lang="en-US" dirty="0"/>
-              <a:t> </a:t>
-            </a:r>
-            <a:r>
-              <a:rPr lang="en-US" dirty="0" err="1"/>
-              <a:t>si</a:t>
-            </a:r>
-            <a:r>
-              <a:rPr lang="en-US" dirty="0"/>
-              <a:t> hay </a:t>
-            </a:r>
-            <a:r>
-              <a:rPr lang="en-US" dirty="0" err="1"/>
-              <a:t>más</a:t>
-            </a:r>
-            <a:r>
-              <a:rPr lang="en-US" dirty="0"/>
-              <a:t> o </a:t>
-            </a:r>
-            <a:r>
-              <a:rPr lang="en-US" dirty="0" err="1"/>
-              <a:t>menos</a:t>
-            </a:r>
-            <a:r>
-              <a:rPr lang="en-US" dirty="0"/>
-              <a:t> </a:t>
-            </a:r>
-            <a:r>
-              <a:rPr lang="en-US" dirty="0" err="1"/>
-              <a:t>separación</a:t>
-            </a:r>
-            <a:r>
-              <a:rPr lang="en-US" dirty="0"/>
-              <a:t> entre la </a:t>
-            </a:r>
-            <a:r>
-              <a:rPr lang="en-US" dirty="0" err="1"/>
-              <a:t>velocidad</a:t>
-            </a:r>
-            <a:r>
-              <a:rPr lang="en-US" dirty="0"/>
-              <a:t> de </a:t>
-            </a:r>
-            <a:r>
-              <a:rPr lang="en-US" dirty="0" err="1"/>
-              <a:t>fase</a:t>
-            </a:r>
-            <a:r>
-              <a:rPr lang="en-US" dirty="0"/>
-              <a:t> y la </a:t>
-            </a:r>
-            <a:r>
-              <a:rPr lang="en-US" dirty="0" err="1"/>
-              <a:t>velocidad</a:t>
-            </a:r>
-            <a:r>
-              <a:rPr lang="en-US" dirty="0"/>
-              <a:t> de </a:t>
-            </a:r>
-            <a:r>
-              <a:rPr lang="en-US" dirty="0" err="1"/>
-              <a:t>grupo</a:t>
-            </a:r>
-            <a:r>
-              <a:rPr lang="en-US" dirty="0"/>
-              <a:t>. </a:t>
-            </a:r>
-          </a:p>
-          <a:p>
-            <a:r>
-              <a:rPr lang="en-US" dirty="0" err="1"/>
-              <a:t>Respecto</a:t>
-            </a:r>
-            <a:r>
-              <a:rPr lang="en-US" dirty="0"/>
-              <a:t> al valor de </a:t>
-            </a:r>
-            <a:r>
-              <a:rPr lang="en-US" dirty="0" err="1"/>
-              <a:t>Dispersión</a:t>
+              <a:t>pulso</a:t>
             </a:r>
             <a:r>
               <a:rPr lang="en-US" dirty="0"/>
